--- a/docs/Can-a-Routine-CBC-Predict-Chronic-Disease_v2.pptx
+++ b/docs/Can-a-Routine-CBC-Predict-Chronic-Disease_v2.pptx
@@ -16,6 +16,7 @@
     <p:sldId id="261" r:id="rId6"/>
     <p:sldId id="273" r:id="rId7"/>
     <p:sldId id="275" r:id="rId19"/>
+    <p:sldId id="276" r:id="rId20"/>
     <p:sldId id="264" r:id="rId8"/>
     <p:sldId id="265" r:id="rId9"/>
   </p:sldIdLst>
@@ -1691,7 +1692,7 @@
                 </a:solidFill>
                 <a:latin typeface="Calibri"/>
               </a:rPr>
-              <a:t>Lift = AUC-PR / prevalence. Values &gt; 1 mean the formula outperforms random flagging at the disease’s base rate.</a:t>
+              <a:t>Lift = AUC-PR / prevalence. Values &gt; 1 mean the formula outperforms random flagging. Y-axis capped at 8× (M2 Lupus = 11.36×, M2 Psoriasis = 7.02×).</a:t>
             </a:r>
           </a:p>
         </p:txBody>
@@ -1712,8 +1713,8 @@
         </p:blipFill>
         <p:spPr>
           <a:xfrm>
-            <a:off x="274320" y="1143000"/>
-            <a:ext cx="11612880" cy="5120640"/>
+            <a:off x="182880" y="1097280"/>
+            <a:ext cx="11887200" cy="5212080"/>
           </a:xfrm>
           <a:prstGeom prst="rect">
             <a:avLst/>
@@ -1750,7 +1751,154 @@
                 </a:solidFill>
                 <a:latin typeface="Calibri"/>
               </a:rPr>
-              <a:t>B1 = Threshold baseline (M1). M3-GP highlighted in green. T2D shows markedly higher absolute lift due to higher CBC-disease correlation.</a:t>
+              <a:t>B1 = single-feature threshold baseline. M5 (dark green) = Seeded GP using LLM-generated formula seeds. T2D has no M5 (seeding not applied). M2’s high MIMIC lift on lup/psr reflects feature count overfitting — see next slide.</a:t>
+            </a:r>
+          </a:p>
+        </p:txBody>
+      </p:sp>
+    </p:spTree>
+  </p:cSld>
+  <p:clrMapOvr>
+    <a:masterClrMapping/>
+  </p:clrMapOvr>
+</p:sld>
+</file>
+
+<file path=ppt/slides/slide11.xml><?xml version="1.0" encoding="utf-8"?>
+<p:sld xmlns:a="http://schemas.openxmlformats.org/drawingml/2006/main" xmlns:p="http://schemas.openxmlformats.org/presentationml/2006/main" xmlns:r="http://schemas.openxmlformats.org/officeDocument/2006/relationships">
+  <p:cSld>
+    <p:spTree>
+      <p:nvGrpSpPr>
+        <p:cNvPr id="1" name=""/>
+        <p:cNvGrpSpPr/>
+        <p:nvPr/>
+      </p:nvGrpSpPr>
+      <p:grpSpPr/>
+      <p:sp>
+        <p:nvSpPr>
+          <p:cNvPr id="2" name="TextBox 1"/>
+          <p:cNvSpPr txBox="1"/>
+          <p:nvPr/>
+        </p:nvSpPr>
+        <p:spPr>
+          <a:xfrm>
+            <a:off x="457200" y="228600"/>
+            <a:ext cx="11247120" cy="502920"/>
+          </a:xfrm>
+          <a:prstGeom prst="rect">
+            <a:avLst/>
+          </a:prstGeom>
+          <a:noFill/>
+        </p:spPr>
+        <p:txBody>
+          <a:bodyPr wrap="square">
+            <a:spAutoFit/>
+          </a:bodyPr>
+          <a:lstStyle/>
+          <a:p>
+            <a:pPr algn="l"/>
+            <a:r>
+              <a:rPr sz="2200" b="1" i="0">
+                <a:solidFill>
+                  <a:srgbClr val="1F397D"/>
+                </a:solidFill>
+                <a:latin typeface="Calibri"/>
+              </a:rPr>
+              <a:t>Why M5? M2 Overfits — M5 Generalises</a:t>
+            </a:r>
+          </a:p>
+        </p:txBody>
+      </p:sp>
+      <p:sp>
+        <p:nvSpPr>
+          <p:cNvPr id="3" name="TextBox 2"/>
+          <p:cNvSpPr txBox="1"/>
+          <p:nvPr/>
+        </p:nvSpPr>
+        <p:spPr>
+          <a:xfrm>
+            <a:off x="457200" y="758952"/>
+            <a:ext cx="11247120" cy="274320"/>
+          </a:xfrm>
+          <a:prstGeom prst="rect">
+            <a:avLst/>
+          </a:prstGeom>
+          <a:noFill/>
+        </p:spPr>
+        <p:txBody>
+          <a:bodyPr wrap="square">
+            <a:spAutoFit/>
+          </a:bodyPr>
+          <a:lstStyle/>
+          <a:p>
+            <a:pPr algn="l"/>
+            <a:r>
+              <a:rPr sz="1000" b="0" i="1">
+                <a:solidFill>
+                  <a:srgbClr val="555555"/>
+                </a:solidFill>
+                <a:latin typeface="Calibri"/>
+              </a:rPr>
+              <a:t>M2 (Random Search) uses 4–13 features and achieves very high MIMIC test-set lift. On EHRSHOT (unseen Stanford data) that advantage nearly vanishes. M5 (Seeded GP, 3–6 features) is more consistent across both datasets.</a:t>
+            </a:r>
+          </a:p>
+        </p:txBody>
+      </p:sp>
+      <p:pic>
+        <p:nvPicPr>
+          <p:cNvPr id="4" name="Picture 3" descr="image.png"/>
+          <p:cNvPicPr>
+            <a:picLocks noChangeAspect="1"/>
+          </p:cNvPicPr>
+          <p:nvPr/>
+        </p:nvPicPr>
+        <p:blipFill>
+          <a:blip r:embed="rId2"/>
+          <a:stretch>
+            <a:fillRect/>
+          </a:stretch>
+        </p:blipFill>
+        <p:spPr>
+          <a:xfrm>
+            <a:off x="182880" y="1097280"/>
+            <a:ext cx="11887200" cy="5029200"/>
+          </a:xfrm>
+          <a:prstGeom prst="rect">
+            <a:avLst/>
+          </a:prstGeom>
+        </p:spPr>
+      </p:pic>
+      <p:sp>
+        <p:nvSpPr>
+          <p:cNvPr id="5" name="TextBox 4"/>
+          <p:cNvSpPr txBox="1"/>
+          <p:nvPr/>
+        </p:nvSpPr>
+        <p:spPr>
+          <a:xfrm>
+            <a:off x="457200" y="6217920"/>
+            <a:ext cx="11247120" cy="365760"/>
+          </a:xfrm>
+          <a:prstGeom prst="rect">
+            <a:avLst/>
+          </a:prstGeom>
+          <a:noFill/>
+        </p:spPr>
+        <p:txBody>
+          <a:bodyPr wrap="square">
+            <a:spAutoFit/>
+          </a:bodyPr>
+          <a:lstStyle/>
+          <a:p>
+            <a:pPr algn="l"/>
+            <a:r>
+              <a:rPr sz="900" b="0" i="1">
+                <a:solidFill>
+                  <a:srgbClr val="555555"/>
+                </a:solidFill>
+                <a:latin typeface="Calibri"/>
+              </a:rPr>
+              <a:t>Features used:  RA: M2=9, M5=4   |   Crohn: M2=13, M5=4   |   T1D: M2=6, M5=9   |   Psoriasis: M2=4, M5=3   |   Lupus: M2=8, M5=6</a:t>
             </a:r>
           </a:p>
         </p:txBody>
@@ -11971,7 +12119,7 @@
                 </a:solidFill>
                 <a:latin typeface="Calibri"/>
               </a:rPr>
-              <a:t>EHRSHOT (Stanford) — AUC-PR Lift (lift = AUC-PR / cohort prevalence)</a:t>
+              <a:t>EHRSHOT (Stanford EHR) — AUC-PR Lift  (lift = AUC-PR / cohort prevalence)</a:t>
             </a:r>
           </a:p>
         </p:txBody>
@@ -11992,8 +12140,8 @@
         </p:blipFill>
         <p:spPr>
           <a:xfrm>
-            <a:off x="457200" y="1737360"/>
-            <a:ext cx="11247120" cy="3931920"/>
+            <a:off x="274320" y="1737360"/>
+            <a:ext cx="11612880" cy="3931920"/>
           </a:xfrm>
           <a:prstGeom prst="rect">
             <a:avLst/>

--- a/docs/Can-a-Routine-CBC-Predict-Chronic-Disease_v2.pptx
+++ b/docs/Can-a-Routine-CBC-Predict-Chronic-Disease_v2.pptx
@@ -5,32 +5,32 @@
     <p:sldMasterId id="2147483651" r:id="rId1"/>
   </p:sldMasterIdLst>
   <p:notesMasterIdLst>
-    <p:notesMasterId r:id="rId10"/>
+    <p:notesMasterId r:id="rId13"/>
   </p:notesMasterIdLst>
   <p:sldIdLst>
     <p:sldId id="266" r:id="rId2"/>
     <p:sldId id="257" r:id="rId3"/>
-    <p:sldId id="274" r:id="rId18"/>
-    <p:sldId id="258" r:id="rId4"/>
-    <p:sldId id="272" r:id="rId5"/>
-    <p:sldId id="261" r:id="rId6"/>
-    <p:sldId id="273" r:id="rId7"/>
-    <p:sldId id="275" r:id="rId19"/>
-    <p:sldId id="276" r:id="rId20"/>
-    <p:sldId id="264" r:id="rId8"/>
-    <p:sldId id="265" r:id="rId9"/>
+    <p:sldId id="274" r:id="rId4"/>
+    <p:sldId id="258" r:id="rId5"/>
+    <p:sldId id="272" r:id="rId6"/>
+    <p:sldId id="261" r:id="rId7"/>
+    <p:sldId id="273" r:id="rId8"/>
+    <p:sldId id="275" r:id="rId9"/>
+    <p:sldId id="276" r:id="rId10"/>
+    <p:sldId id="264" r:id="rId11"/>
+    <p:sldId id="265" r:id="rId12"/>
   </p:sldIdLst>
   <p:sldSz cx="12192000" cy="6858000"/>
   <p:notesSz cx="6858000" cy="12192000"/>
   <p:embeddedFontLst>
     <p:embeddedFont>
       <p:font typeface="Mukta Light" panose="020B0604020202020204" charset="0"/>
-      <p:regular r:id="rId11"/>
+      <p:regular r:id="rId14"/>
     </p:embeddedFont>
     <p:embeddedFont>
       <p:font typeface="Prompt Medium" panose="00000600000000000000" pitchFamily="2" charset="-34"/>
-      <p:regular r:id="rId12"/>
-      <p:italic r:id="rId13"/>
+      <p:regular r:id="rId15"/>
+      <p:italic r:id="rId16"/>
     </p:embeddedFont>
   </p:embeddedFontLst>
   <p:defaultTextStyle>
@@ -558,7 +558,7 @@
           <a:p>
             <a:fld id="{F7021451-1387-4CA6-816F-3879F97B5CBC}" type="slidenum">
               <a:rPr lang="en-US"/>
-              <a:t>3</a:t>
+              <a:t>4</a:t>
             </a:fld>
             <a:endParaRPr lang="en-US"/>
           </a:p>
@@ -642,7 +642,7 @@
           <a:p>
             <a:fld id="{F7021451-1387-4CA6-816F-3879F97B5CBC}" type="slidenum">
               <a:rPr lang="en-US"/>
-              <a:t>5</a:t>
+              <a:t>6</a:t>
             </a:fld>
             <a:endParaRPr lang="en-US"/>
           </a:p>
@@ -726,7 +726,7 @@
           <a:p>
             <a:fld id="{F7021451-1387-4CA6-816F-3879F97B5CBC}" type="slidenum">
               <a:rPr lang="en-US"/>
-              <a:t>6</a:t>
+              <a:t>7</a:t>
             </a:fld>
             <a:endParaRPr lang="en-US"/>
           </a:p>
@@ -810,7 +810,7 @@
           <a:p>
             <a:fld id="{F7021451-1387-4CA6-816F-3879F97B5CBC}" type="slidenum">
               <a:rPr lang="en-US"/>
-              <a:t>7</a:t>
+              <a:t>10</a:t>
             </a:fld>
             <a:endParaRPr lang="en-US"/>
           </a:p>
@@ -933,7 +933,7 @@
           <a:p>
             <a:fld id="{F7021451-1387-4CA6-816F-3879F97B5CBC}" type="slidenum">
               <a:rPr lang="en-US"/>
-              <a:t>8</a:t>
+              <a:t>11</a:t>
             </a:fld>
             <a:endParaRPr lang="en-US"/>
           </a:p>
@@ -1412,50 +1412,6 @@
       </p:sp>
       <p:sp>
         <p:nvSpPr>
-          <p:cNvPr id="3" name="Text 1"/>
-          <p:cNvSpPr/>
-          <p:nvPr/>
-        </p:nvSpPr>
-        <p:spPr>
-          <a:xfrm>
-            <a:off x="962398" y="2633663"/>
-            <a:ext cx="10266800" cy="582712"/>
-          </a:xfrm>
-          <a:prstGeom prst="rect">
-            <a:avLst/>
-          </a:prstGeom>
-          <a:noFill/>
-          <a:ln/>
-        </p:spPr>
-        <p:txBody>
-          <a:bodyPr wrap="none" lIns="0" tIns="0" rIns="0" bIns="0" rtlCol="0" anchor="t"/>
-          <a:lstStyle/>
-          <a:p>
-            <a:pPr marL="0" indent="0" algn="ctr" rtl="1">
-              <a:lnSpc>
-                <a:spcPct val="104000"/>
-              </a:lnSpc>
-              <a:buNone/>
-            </a:pPr>
-            <a:r>
-              <a:rPr lang="he-IL" altLang="en-US" sz="3650" dirty="0">
-                <a:solidFill>
-                  <a:srgbClr val="C6BFEE"/>
-                </a:solidFill>
-                <a:latin typeface="Aptos" panose="020B0004020202020204" pitchFamily="34" charset="0"/>
-                <a:ea typeface="Prompt Medium" pitchFamily="34" charset="-122"/>
-                <a:cs typeface="Aptos" pitchFamily="34" charset="-120"/>
-              </a:rPr>
-              <a:t>האם ספירת דם שגרתית יכולה לנבא מחלה כרונית?</a:t>
-            </a:r>
-            <a:endParaRPr lang="he-IL" sz="3650" dirty="0">
-              <a:latin typeface="Aptos" panose="020B0004020202020204" pitchFamily="34" charset="0"/>
-            </a:endParaRPr>
-          </a:p>
-        </p:txBody>
-      </p:sp>
-      <p:sp>
-        <p:nvSpPr>
           <p:cNvPr id="4" name="Text 2"/>
           <p:cNvSpPr/>
           <p:nvPr/>
@@ -1618,30 +1574,463 @@
 </file>
 
 <file path=ppt/slides/slide10.xml><?xml version="1.0" encoding="utf-8"?>
-<p:sld xmlns:a="http://schemas.openxmlformats.org/drawingml/2006/main" xmlns:p="http://schemas.openxmlformats.org/presentationml/2006/main" xmlns:r="http://schemas.openxmlformats.org/officeDocument/2006/relationships">
-  <p:cSld>
+<p:sld xmlns:a="http://schemas.openxmlformats.org/drawingml/2006/main" xmlns:r="http://schemas.openxmlformats.org/officeDocument/2006/relationships" xmlns:p="http://schemas.openxmlformats.org/presentationml/2006/main">
+  <p:cSld name="Slide 9">
     <p:spTree>
       <p:nvGrpSpPr>
         <p:cNvPr id="1" name=""/>
         <p:cNvGrpSpPr/>
         <p:nvPr/>
       </p:nvGrpSpPr>
-      <p:grpSpPr/>
-      <p:sp>
-        <p:nvSpPr>
-          <p:cNvPr id="2" name="TextBox 1"/>
-          <p:cNvSpPr txBox="1"/>
-          <p:nvPr/>
-        </p:nvSpPr>
-        <p:spPr>
-          <a:xfrm>
-            <a:off x="457200" y="274320"/>
-            <a:ext cx="11247120" cy="502920"/>
+      <p:grpSpPr>
+        <a:xfrm>
+          <a:off x="0" y="0"/>
+          <a:ext cx="0" cy="0"/>
+          <a:chOff x="0" y="0"/>
+          <a:chExt cx="0" cy="0"/>
+        </a:xfrm>
+      </p:grpSpPr>
+      <p:pic>
+        <p:nvPicPr>
+          <p:cNvPr id="2" name="Image 0" descr="preencoded.png"/>
+          <p:cNvPicPr>
+            <a:picLocks noChangeAspect="1"/>
+          </p:cNvPicPr>
+          <p:nvPr/>
+        </p:nvPicPr>
+        <p:blipFill>
+          <a:blip r:embed="rId3"/>
+          <a:stretch>
+            <a:fillRect/>
+          </a:stretch>
+        </p:blipFill>
+        <p:spPr>
+          <a:xfrm>
+            <a:off x="7619809" y="0"/>
+            <a:ext cx="4571886" cy="6858000"/>
+          </a:xfrm>
+          <a:prstGeom prst="rect">
+            <a:avLst/>
+          </a:prstGeom>
+        </p:spPr>
+      </p:pic>
+      <p:sp>
+        <p:nvSpPr>
+          <p:cNvPr id="3" name="Text 0"/>
+          <p:cNvSpPr/>
+          <p:nvPr/>
+        </p:nvSpPr>
+        <p:spPr>
+          <a:xfrm>
+            <a:off x="734200" y="895945"/>
+            <a:ext cx="6151409" cy="990600"/>
           </a:xfrm>
           <a:prstGeom prst="rect">
             <a:avLst/>
           </a:prstGeom>
           <a:noFill/>
+          <a:ln/>
+        </p:spPr>
+        <p:txBody>
+          <a:bodyPr wrap="square" lIns="0" tIns="0" rIns="0" bIns="0" rtlCol="0" anchor="t">
+            <a:normAutofit/>
+          </a:bodyPr>
+          <a:lstStyle/>
+          <a:p>
+            <a:pPr marL="0" indent="0" algn="l">
+              <a:lnSpc>
+                <a:spcPct val="104000"/>
+              </a:lnSpc>
+              <a:buNone/>
+            </a:pPr>
+            <a:r>
+              <a:rPr lang="en-US" sz="3100" dirty="0">
+                <a:solidFill>
+                  <a:srgbClr val="C6BFEE"/>
+                </a:solidFill>
+                <a:latin typeface="Prompt Medium" pitchFamily="34" charset="0"/>
+                <a:ea typeface="Prompt Medium" pitchFamily="34" charset="-122"/>
+                <a:cs typeface="Prompt Medium" pitchFamily="34" charset="-120"/>
+              </a:rPr>
+              <a:t>External Validation &amp; Generalization</a:t>
+            </a:r>
+            <a:endParaRPr lang="en-US" sz="3100" dirty="0"/>
+          </a:p>
+        </p:txBody>
+      </p:sp>
+      <p:sp>
+        <p:nvSpPr>
+          <p:cNvPr id="5" name="Shape 2"/>
+          <p:cNvSpPr/>
+          <p:nvPr/>
+        </p:nvSpPr>
+        <p:spPr>
+          <a:xfrm>
+            <a:off x="734200" y="2811959"/>
+            <a:ext cx="2999903" cy="2026940"/>
+          </a:xfrm>
+          <a:prstGeom prst="roundRect">
+            <a:avLst>
+              <a:gd name="adj" fmla="val 3695"/>
+            </a:avLst>
+          </a:prstGeom>
+          <a:solidFill>
+            <a:srgbClr val="542C49"/>
+          </a:solidFill>
+          <a:ln w="6350">
+            <a:solidFill>
+              <a:srgbClr val="6D4562"/>
+            </a:solidFill>
+            <a:prstDash val="solid"/>
+          </a:ln>
+        </p:spPr>
+        <p:txBody>
+          <a:bodyPr/>
+          <a:lstStyle/>
+          <a:p>
+            <a:endParaRPr lang="LID4096"/>
+          </a:p>
+        </p:txBody>
+      </p:sp>
+      <p:sp>
+        <p:nvSpPr>
+          <p:cNvPr id="6" name="Text 3"/>
+          <p:cNvSpPr/>
+          <p:nvPr/>
+        </p:nvSpPr>
+        <p:spPr>
+          <a:xfrm>
+            <a:off x="918842" y="2996605"/>
+            <a:ext cx="1981349" cy="247650"/>
+          </a:xfrm>
+          <a:prstGeom prst="rect">
+            <a:avLst/>
+          </a:prstGeom>
+          <a:noFill/>
+          <a:ln/>
+        </p:spPr>
+        <p:txBody>
+          <a:bodyPr wrap="none" lIns="0" tIns="0" rIns="0" bIns="0" rtlCol="0" anchor="t"/>
+          <a:lstStyle/>
+          <a:p>
+            <a:pPr marL="0" indent="0" algn="l">
+              <a:lnSpc>
+                <a:spcPct val="104000"/>
+              </a:lnSpc>
+              <a:buNone/>
+            </a:pPr>
+            <a:r>
+              <a:rPr lang="en-US" sz="1550" dirty="0">
+                <a:solidFill>
+                  <a:srgbClr val="DAD8E9"/>
+                </a:solidFill>
+                <a:latin typeface="Prompt Medium" pitchFamily="34" charset="0"/>
+                <a:ea typeface="Prompt Medium" pitchFamily="34" charset="-122"/>
+                <a:cs typeface="Prompt Medium" pitchFamily="34" charset="-120"/>
+              </a:rPr>
+              <a:t>MIMIC-IV</a:t>
+            </a:r>
+            <a:endParaRPr lang="en-US" sz="1550" dirty="0"/>
+          </a:p>
+        </p:txBody>
+      </p:sp>
+      <p:sp>
+        <p:nvSpPr>
+          <p:cNvPr id="7" name="Text 4"/>
+          <p:cNvSpPr/>
+          <p:nvPr/>
+        </p:nvSpPr>
+        <p:spPr>
+          <a:xfrm>
+            <a:off x="918842" y="3335139"/>
+            <a:ext cx="2630620" cy="791468"/>
+          </a:xfrm>
+          <a:prstGeom prst="rect">
+            <a:avLst/>
+          </a:prstGeom>
+          <a:noFill/>
+          <a:ln/>
+        </p:spPr>
+        <p:txBody>
+          <a:bodyPr wrap="square" lIns="0" tIns="0" rIns="0" bIns="0" rtlCol="0" anchor="t">
+            <a:normAutofit/>
+          </a:bodyPr>
+          <a:lstStyle/>
+          <a:p>
+            <a:pPr marL="0" indent="0" algn="l">
+              <a:lnSpc>
+                <a:spcPct val="123000"/>
+              </a:lnSpc>
+              <a:buNone/>
+            </a:pPr>
+            <a:r>
+              <a:rPr lang="en-US" sz="1400" dirty="0">
+                <a:solidFill>
+                  <a:srgbClr val="DAD8E9"/>
+                </a:solidFill>
+                <a:latin typeface="Mukta Light" pitchFamily="34" charset="0"/>
+                <a:ea typeface="Mukta Light" pitchFamily="34" charset="-122"/>
+                <a:cs typeface="Mukta Light" pitchFamily="34" charset="-120"/>
+              </a:rPr>
+              <a:t>Train + internal test. ~223K patients, 6 diseases. Bootstrap CI (n=1,000).</a:t>
+            </a:r>
+            <a:endParaRPr lang="en-US" sz="1400" dirty="0"/>
+          </a:p>
+        </p:txBody>
+      </p:sp>
+      <p:sp>
+        <p:nvSpPr>
+          <p:cNvPr id="8" name="Shape 5"/>
+          <p:cNvSpPr/>
+          <p:nvPr/>
+        </p:nvSpPr>
+        <p:spPr>
+          <a:xfrm>
+            <a:off x="3885607" y="2811959"/>
+            <a:ext cx="3000002" cy="2026940"/>
+          </a:xfrm>
+          <a:prstGeom prst="roundRect">
+            <a:avLst>
+              <a:gd name="adj" fmla="val 3695"/>
+            </a:avLst>
+          </a:prstGeom>
+          <a:solidFill>
+            <a:srgbClr val="542C49"/>
+          </a:solidFill>
+          <a:ln w="6350">
+            <a:solidFill>
+              <a:srgbClr val="6D4562"/>
+            </a:solidFill>
+            <a:prstDash val="solid"/>
+          </a:ln>
+        </p:spPr>
+        <p:txBody>
+          <a:bodyPr/>
+          <a:lstStyle/>
+          <a:p>
+            <a:endParaRPr lang="LID4096"/>
+          </a:p>
+        </p:txBody>
+      </p:sp>
+      <p:sp>
+        <p:nvSpPr>
+          <p:cNvPr id="9" name="Text 6"/>
+          <p:cNvSpPr/>
+          <p:nvPr/>
+        </p:nvSpPr>
+        <p:spPr>
+          <a:xfrm>
+            <a:off x="4070248" y="2996605"/>
+            <a:ext cx="1981349" cy="247650"/>
+          </a:xfrm>
+          <a:prstGeom prst="rect">
+            <a:avLst/>
+          </a:prstGeom>
+          <a:noFill/>
+          <a:ln/>
+        </p:spPr>
+        <p:txBody>
+          <a:bodyPr wrap="none" lIns="0" tIns="0" rIns="0" bIns="0" rtlCol="0" anchor="t"/>
+          <a:lstStyle/>
+          <a:p>
+            <a:pPr marL="0" indent="0" algn="l">
+              <a:lnSpc>
+                <a:spcPct val="104000"/>
+              </a:lnSpc>
+              <a:buNone/>
+            </a:pPr>
+            <a:r>
+              <a:rPr lang="en-US" sz="1550" dirty="0">
+                <a:solidFill>
+                  <a:srgbClr val="DAD8E9"/>
+                </a:solidFill>
+                <a:latin typeface="Prompt Medium" pitchFamily="34" charset="0"/>
+                <a:ea typeface="Prompt Medium" pitchFamily="34" charset="-122"/>
+                <a:cs typeface="Prompt Medium" pitchFamily="34" charset="-120"/>
+              </a:rPr>
+              <a:t>NHANES</a:t>
+            </a:r>
+            <a:endParaRPr lang="en-US" sz="1550" dirty="0"/>
+          </a:p>
+        </p:txBody>
+      </p:sp>
+      <p:sp>
+        <p:nvSpPr>
+          <p:cNvPr id="10" name="Text 7"/>
+          <p:cNvSpPr/>
+          <p:nvPr/>
+        </p:nvSpPr>
+        <p:spPr>
+          <a:xfrm>
+            <a:off x="4070248" y="3335139"/>
+            <a:ext cx="2630719" cy="1319113"/>
+          </a:xfrm>
+          <a:prstGeom prst="rect">
+            <a:avLst/>
+          </a:prstGeom>
+          <a:noFill/>
+          <a:ln/>
+        </p:spPr>
+        <p:txBody>
+          <a:bodyPr wrap="square" lIns="0" tIns="0" rIns="0" bIns="0" rtlCol="0" anchor="t">
+            <a:normAutofit/>
+          </a:bodyPr>
+          <a:lstStyle/>
+          <a:p>
+            <a:pPr marL="0" indent="0" algn="l">
+              <a:lnSpc>
+                <a:spcPct val="123000"/>
+              </a:lnSpc>
+              <a:buNone/>
+            </a:pPr>
+            <a:r>
+              <a:rPr lang="en-US" sz="1400" dirty="0">
+                <a:solidFill>
+                  <a:srgbClr val="DAD8E9"/>
+                </a:solidFill>
+                <a:latin typeface="Mukta Light" pitchFamily="34" charset="0"/>
+                <a:ea typeface="Mukta Light" pitchFamily="34" charset="-122"/>
+                <a:cs typeface="Mukta Light" pitchFamily="34" charset="-120"/>
+              </a:rPr>
+              <a:t>US national population survey. External validation for RA and Psoriasis only — other diseases excluded after questionnaire variable audit.</a:t>
+            </a:r>
+            <a:endParaRPr lang="en-US" sz="1400" dirty="0"/>
+          </a:p>
+        </p:txBody>
+      </p:sp>
+      <p:sp>
+        <p:nvSpPr>
+          <p:cNvPr id="11" name="Shape 8"/>
+          <p:cNvSpPr/>
+          <p:nvPr/>
+        </p:nvSpPr>
+        <p:spPr>
+          <a:xfrm>
+            <a:off x="734200" y="4990405"/>
+            <a:ext cx="6151409" cy="971649"/>
+          </a:xfrm>
+          <a:prstGeom prst="roundRect">
+            <a:avLst>
+              <a:gd name="adj" fmla="val 7708"/>
+            </a:avLst>
+          </a:prstGeom>
+          <a:solidFill>
+            <a:srgbClr val="542C49"/>
+          </a:solidFill>
+          <a:ln w="6350">
+            <a:solidFill>
+              <a:srgbClr val="6D4562"/>
+            </a:solidFill>
+            <a:prstDash val="solid"/>
+          </a:ln>
+        </p:spPr>
+        <p:txBody>
+          <a:bodyPr/>
+          <a:lstStyle/>
+          <a:p>
+            <a:endParaRPr lang="LID4096"/>
+          </a:p>
+        </p:txBody>
+      </p:sp>
+      <p:sp>
+        <p:nvSpPr>
+          <p:cNvPr id="12" name="Text 9"/>
+          <p:cNvSpPr/>
+          <p:nvPr/>
+        </p:nvSpPr>
+        <p:spPr>
+          <a:xfrm>
+            <a:off x="918842" y="5175052"/>
+            <a:ext cx="1981349" cy="247650"/>
+          </a:xfrm>
+          <a:prstGeom prst="rect">
+            <a:avLst/>
+          </a:prstGeom>
+          <a:noFill/>
+          <a:ln/>
+        </p:spPr>
+        <p:txBody>
+          <a:bodyPr wrap="none" lIns="0" tIns="0" rIns="0" bIns="0" rtlCol="0" anchor="t"/>
+          <a:lstStyle/>
+          <a:p>
+            <a:pPr marL="0" indent="0" algn="l">
+              <a:lnSpc>
+                <a:spcPct val="104000"/>
+              </a:lnSpc>
+              <a:buNone/>
+            </a:pPr>
+            <a:r>
+              <a:rPr lang="en-US" sz="1550" dirty="0">
+                <a:solidFill>
+                  <a:srgbClr val="DAD8E9"/>
+                </a:solidFill>
+                <a:latin typeface="Prompt Medium" pitchFamily="34" charset="0"/>
+                <a:ea typeface="Prompt Medium" pitchFamily="34" charset="-122"/>
+                <a:cs typeface="Prompt Medium" pitchFamily="34" charset="-120"/>
+              </a:rPr>
+              <a:t>EHRSHOT (Stanford)</a:t>
+            </a:r>
+            <a:endParaRPr lang="en-US" sz="1550" dirty="0"/>
+          </a:p>
+        </p:txBody>
+      </p:sp>
+      <p:sp>
+        <p:nvSpPr>
+          <p:cNvPr id="13" name="Text 10"/>
+          <p:cNvSpPr/>
+          <p:nvPr/>
+        </p:nvSpPr>
+        <p:spPr>
+          <a:xfrm>
+            <a:off x="918842" y="5513586"/>
+            <a:ext cx="5782126" cy="263823"/>
+          </a:xfrm>
+          <a:prstGeom prst="rect">
+            <a:avLst/>
+          </a:prstGeom>
+          <a:noFill/>
+          <a:ln/>
+        </p:spPr>
+        <p:txBody>
+          <a:bodyPr wrap="none" lIns="0" tIns="0" rIns="0" bIns="0" rtlCol="0" anchor="t"/>
+          <a:lstStyle/>
+          <a:p>
+            <a:pPr marL="0" indent="0" algn="l">
+              <a:lnSpc>
+                <a:spcPct val="123000"/>
+              </a:lnSpc>
+              <a:buNone/>
+            </a:pPr>
+            <a:r>
+              <a:rPr lang="en-US" sz="1400" dirty="0">
+                <a:solidFill>
+                  <a:srgbClr val="DAD8E9"/>
+                </a:solidFill>
+                <a:latin typeface="Mukta Light" pitchFamily="34" charset="0"/>
+                <a:ea typeface="Mukta Light" pitchFamily="34" charset="-122"/>
+                <a:cs typeface="Mukta Light" pitchFamily="34" charset="-120"/>
+              </a:rPr>
+              <a:t>External clinical validation. OMOP CDM format, different hospital system.</a:t>
+            </a:r>
+            <a:endParaRPr lang="en-US" sz="1400" dirty="0"/>
+          </a:p>
+        </p:txBody>
+      </p:sp>
+      <p:sp>
+        <p:nvSpPr>
+          <p:cNvPr id="14" name="TextBox 13"/>
+          <p:cNvSpPr txBox="1"/>
+          <p:nvPr/>
+        </p:nvSpPr>
+        <p:spPr>
+          <a:xfrm>
+            <a:off x="457200" y="1417320"/>
+            <a:ext cx="11247120" cy="274320"/>
+          </a:xfrm>
+          <a:prstGeom prst="rect">
+            <a:avLst/>
+          </a:prstGeom>
+          <a:noFill/>
         </p:spPr>
         <p:txBody>
           <a:bodyPr wrap="square">
@@ -1651,27 +2040,51 @@
           <a:p>
             <a:pPr algn="l"/>
             <a:r>
-              <a:rPr sz="2200" b="1" i="0">
+              <a:rPr sz="1100" b="1" i="0">
                 <a:solidFill>
                   <a:srgbClr val="1F397D"/>
                 </a:solidFill>
                 <a:latin typeface="Calibri"/>
               </a:rPr>
-              <a:t>AUC-PR Lift Across All 6 Diseases — MIMIC Test Set</a:t>
+              <a:t>EHRSHOT (Stanford EHR) — AUC-PR Lift  (lift = AUC-PR / cohort prevalence)</a:t>
             </a:r>
           </a:p>
         </p:txBody>
       </p:sp>
-      <p:sp>
-        <p:nvSpPr>
-          <p:cNvPr id="3" name="TextBox 2"/>
+      <p:pic>
+        <p:nvPicPr>
+          <p:cNvPr id="15" name="Picture 14" descr="image.png"/>
+          <p:cNvPicPr>
+            <a:picLocks noChangeAspect="1"/>
+          </p:cNvPicPr>
+          <p:nvPr/>
+        </p:nvPicPr>
+        <p:blipFill>
+          <a:blip r:embed="rId4"/>
+          <a:stretch>
+            <a:fillRect/>
+          </a:stretch>
+        </p:blipFill>
+        <p:spPr>
+          <a:xfrm>
+            <a:off x="274320" y="1737360"/>
+            <a:ext cx="11612880" cy="3931920"/>
+          </a:xfrm>
+          <a:prstGeom prst="rect">
+            <a:avLst/>
+          </a:prstGeom>
+        </p:spPr>
+      </p:pic>
+      <p:sp>
+        <p:nvSpPr>
+          <p:cNvPr id="16" name="TextBox 15"/>
           <p:cNvSpPr txBox="1"/>
           <p:nvPr/>
         </p:nvSpPr>
         <p:spPr>
           <a:xfrm>
-            <a:off x="457200" y="804672"/>
-            <a:ext cx="11247120" cy="256032"/>
+            <a:off x="457200" y="5760720"/>
+            <a:ext cx="11247120" cy="548640"/>
           </a:xfrm>
           <a:prstGeom prst="rect">
             <a:avLst/>
@@ -1686,72 +2099,13 @@
           <a:p>
             <a:pPr algn="l"/>
             <a:r>
-              <a:rPr sz="1000" b="0" i="1">
+              <a:rPr sz="900" b="0" i="1">
                 <a:solidFill>
                   <a:srgbClr val="555555"/>
                 </a:solidFill>
                 <a:latin typeface="Calibri"/>
               </a:rPr>
-              <a:t>Lift = AUC-PR / prevalence. Values &gt; 1 mean the formula outperforms random flagging. Y-axis capped at 8× (M2 Lupus = 11.36×, M2 Psoriasis = 7.02×).</a:t>
-            </a:r>
-          </a:p>
-        </p:txBody>
-      </p:sp>
-      <p:pic>
-        <p:nvPicPr>
-          <p:cNvPr id="4" name="Picture 3" descr="image.png"/>
-          <p:cNvPicPr>
-            <a:picLocks noChangeAspect="1"/>
-          </p:cNvPicPr>
-          <p:nvPr/>
-        </p:nvPicPr>
-        <p:blipFill>
-          <a:blip r:embed="rId2"/>
-          <a:stretch>
-            <a:fillRect/>
-          </a:stretch>
-        </p:blipFill>
-        <p:spPr>
-          <a:xfrm>
-            <a:off x="182880" y="1097280"/>
-            <a:ext cx="11887200" cy="5212080"/>
-          </a:xfrm>
-          <a:prstGeom prst="rect">
-            <a:avLst/>
-          </a:prstGeom>
-        </p:spPr>
-      </p:pic>
-      <p:sp>
-        <p:nvSpPr>
-          <p:cNvPr id="5" name="TextBox 4"/>
-          <p:cNvSpPr txBox="1"/>
-          <p:nvPr/>
-        </p:nvSpPr>
-        <p:spPr>
-          <a:xfrm>
-            <a:off x="457200" y="6355080"/>
-            <a:ext cx="11247120" cy="274320"/>
-          </a:xfrm>
-          <a:prstGeom prst="rect">
-            <a:avLst/>
-          </a:prstGeom>
-          <a:noFill/>
-        </p:spPr>
-        <p:txBody>
-          <a:bodyPr wrap="square">
-            <a:spAutoFit/>
-          </a:bodyPr>
-          <a:lstStyle/>
-          <a:p>
-            <a:pPr algn="l"/>
-            <a:r>
-              <a:rPr sz="900" b="0" i="1">
-                <a:solidFill>
-                  <a:srgbClr val="777777"/>
-                </a:solidFill>
-                <a:latin typeface="Calibri"/>
-              </a:rPr>
-              <a:t>B1 = single-feature threshold baseline. M5 (dark green) = Seeded GP using LLM-generated formula seeds. T2D has no M5 (seeding not applied). M2’s high MIMIC lift on lup/psr reflects feature count overfitting — see next slide.</a:t>
+              <a:t>NHANES (US population survey, RA + Psoriasis only): RA AUC-PR — M1: 0.082, M2: 0.077, M3: 0.079, M4: 0.102.  Psoriasis — M1: 0.022, M2: 0.033, M3: 0.038, M4: 0.035.  (Lift not computed: NHANES prevalence unknown due to self-report inflation.)</a:t>
             </a:r>
           </a:p>
         </p:txBody>
@@ -1765,103 +2119,228 @@
 </file>
 
 <file path=ppt/slides/slide11.xml><?xml version="1.0" encoding="utf-8"?>
-<p:sld xmlns:a="http://schemas.openxmlformats.org/drawingml/2006/main" xmlns:p="http://schemas.openxmlformats.org/presentationml/2006/main" xmlns:r="http://schemas.openxmlformats.org/officeDocument/2006/relationships">
-  <p:cSld>
+<p:sld xmlns:a="http://schemas.openxmlformats.org/drawingml/2006/main" xmlns:r="http://schemas.openxmlformats.org/officeDocument/2006/relationships" xmlns:p="http://schemas.openxmlformats.org/presentationml/2006/main">
+  <p:cSld name="Slide 10">
     <p:spTree>
       <p:nvGrpSpPr>
         <p:cNvPr id="1" name=""/>
         <p:cNvGrpSpPr/>
         <p:nvPr/>
       </p:nvGrpSpPr>
-      <p:grpSpPr/>
-      <p:sp>
-        <p:nvSpPr>
-          <p:cNvPr id="2" name="TextBox 1"/>
-          <p:cNvSpPr txBox="1"/>
-          <p:nvPr/>
-        </p:nvSpPr>
-        <p:spPr>
-          <a:xfrm>
-            <a:off x="457200" y="228600"/>
-            <a:ext cx="11247120" cy="502920"/>
+      <p:grpSpPr>
+        <a:xfrm>
+          <a:off x="0" y="0"/>
+          <a:ext cx="0" cy="0"/>
+          <a:chOff x="0" y="0"/>
+          <a:chExt cx="0" cy="0"/>
+        </a:xfrm>
+      </p:grpSpPr>
+      <p:pic>
+        <p:nvPicPr>
+          <p:cNvPr id="2" name="Image 0" descr="preencoded.png"/>
+          <p:cNvPicPr>
+            <a:picLocks noChangeAspect="1"/>
+          </p:cNvPicPr>
+          <p:nvPr/>
+        </p:nvPicPr>
+        <p:blipFill>
+          <a:blip r:embed="rId3"/>
+          <a:stretch>
+            <a:fillRect/>
+          </a:stretch>
+        </p:blipFill>
+        <p:spPr>
+          <a:xfrm>
+            <a:off x="7619809" y="0"/>
+            <a:ext cx="4571886" cy="6858000"/>
+          </a:xfrm>
+          <a:prstGeom prst="rect">
+            <a:avLst/>
+          </a:prstGeom>
+        </p:spPr>
+      </p:pic>
+      <p:sp>
+        <p:nvSpPr>
+          <p:cNvPr id="3" name="Text 0"/>
+          <p:cNvSpPr/>
+          <p:nvPr/>
+        </p:nvSpPr>
+        <p:spPr>
+          <a:xfrm>
+            <a:off x="734200" y="1045766"/>
+            <a:ext cx="3873105" cy="407888"/>
           </a:xfrm>
           <a:prstGeom prst="rect">
             <a:avLst/>
           </a:prstGeom>
           <a:noFill/>
-        </p:spPr>
-        <p:txBody>
-          <a:bodyPr wrap="square">
-            <a:spAutoFit/>
-          </a:bodyPr>
-          <a:lstStyle/>
-          <a:p>
-            <a:pPr algn="l"/>
+          <a:ln/>
+        </p:spPr>
+        <p:txBody>
+          <a:bodyPr wrap="none" lIns="0" tIns="0" rIns="0" bIns="0" rtlCol="0" anchor="t"/>
+          <a:lstStyle/>
+          <a:p>
+            <a:pPr marL="0" indent="0" algn="l">
+              <a:lnSpc>
+                <a:spcPct val="104000"/>
+              </a:lnSpc>
+              <a:buNone/>
+            </a:pPr>
             <a:r>
-              <a:rPr sz="2200" b="1" i="0">
+              <a:rPr lang="en-US" sz="2550" dirty="0">
                 <a:solidFill>
-                  <a:srgbClr val="1F397D"/>
+                  <a:srgbClr val="C6BFEE"/>
                 </a:solidFill>
-                <a:latin typeface="Calibri"/>
+                <a:latin typeface="Prompt Medium" pitchFamily="34" charset="0"/>
+                <a:ea typeface="Prompt Medium" pitchFamily="34" charset="-122"/>
+                <a:cs typeface="Prompt Medium" pitchFamily="34" charset="-120"/>
               </a:rPr>
-              <a:t>Why M5? M2 Overfits — M5 Generalises</a:t>
+              <a:t>Summary &amp; Closing</a:t>
             </a:r>
-          </a:p>
-        </p:txBody>
-      </p:sp>
-      <p:sp>
-        <p:nvSpPr>
-          <p:cNvPr id="3" name="TextBox 2"/>
-          <p:cNvSpPr txBox="1"/>
-          <p:nvPr/>
-        </p:nvSpPr>
-        <p:spPr>
-          <a:xfrm>
-            <a:off x="457200" y="758952"/>
-            <a:ext cx="11247120" cy="274320"/>
+            <a:endParaRPr lang="en-US" sz="2550" dirty="0"/>
+          </a:p>
+        </p:txBody>
+      </p:sp>
+      <p:pic>
+        <p:nvPicPr>
+          <p:cNvPr id="4" name="Image 1" descr="preencoded.png"/>
+          <p:cNvPicPr>
+            <a:picLocks noChangeAspect="1"/>
+          </p:cNvPicPr>
+          <p:nvPr/>
+        </p:nvPicPr>
+        <p:blipFill>
+          <a:blip>
+            <a:extLst>
+              <a:ext uri="{96DAC541-7B7A-43D3-8B79-37D633B846F1}">
+                <asvg:svgBlip xmlns:asvg="http://schemas.microsoft.com/office/drawing/2016/SVG/main" r:embed="rId4"/>
+              </a:ext>
+            </a:extLst>
+          </a:blip>
+          <a:stretch>
+            <a:fillRect/>
+          </a:stretch>
+        </p:blipFill>
+        <p:spPr>
+          <a:xfrm>
+            <a:off x="734200" y="1607840"/>
+            <a:ext cx="3024310" cy="1821755"/>
+          </a:xfrm>
+          <a:prstGeom prst="rect">
+            <a:avLst/>
+          </a:prstGeom>
+        </p:spPr>
+      </p:pic>
+      <p:sp>
+        <p:nvSpPr>
+          <p:cNvPr id="5" name="Text 1"/>
+          <p:cNvSpPr/>
+          <p:nvPr/>
+        </p:nvSpPr>
+        <p:spPr>
+          <a:xfrm>
+            <a:off x="2158251" y="1717973"/>
+            <a:ext cx="176208" cy="220266"/>
           </a:xfrm>
           <a:prstGeom prst="rect">
             <a:avLst/>
           </a:prstGeom>
           <a:noFill/>
-        </p:spPr>
-        <p:txBody>
-          <a:bodyPr wrap="square">
-            <a:spAutoFit/>
+          <a:ln/>
+        </p:spPr>
+        <p:txBody>
+          <a:bodyPr wrap="none" lIns="0" tIns="0" rIns="0" bIns="0" rtlCol="0" anchor="ctr"/>
+          <a:lstStyle/>
+          <a:p>
+            <a:pPr marL="0" indent="0" algn="ctr">
+              <a:lnSpc>
+                <a:spcPct val="100000"/>
+              </a:lnSpc>
+              <a:buNone/>
+            </a:pPr>
+            <a:r>
+              <a:rPr lang="en-US" sz="1350" dirty="0">
+                <a:solidFill>
+                  <a:srgbClr val="FFFFFF"/>
+                </a:solidFill>
+                <a:latin typeface="Prompt Medium" pitchFamily="34" charset="0"/>
+                <a:ea typeface="Prompt Medium" pitchFamily="34" charset="-122"/>
+                <a:cs typeface="Prompt Medium" pitchFamily="34" charset="-120"/>
+              </a:rPr>
+              <a:t>1</a:t>
+            </a:r>
+            <a:endParaRPr lang="en-US" sz="1350" dirty="0"/>
+          </a:p>
+        </p:txBody>
+      </p:sp>
+      <p:sp>
+        <p:nvSpPr>
+          <p:cNvPr id="6" name="Text 2"/>
+          <p:cNvSpPr/>
+          <p:nvPr/>
+        </p:nvSpPr>
+        <p:spPr>
+          <a:xfrm>
+            <a:off x="900090" y="2195215"/>
+            <a:ext cx="2692531" cy="407988"/>
+          </a:xfrm>
+          <a:prstGeom prst="rect">
+            <a:avLst/>
+          </a:prstGeom>
+          <a:noFill/>
+          <a:ln/>
+        </p:spPr>
+        <p:txBody>
+          <a:bodyPr wrap="square" lIns="0" tIns="0" rIns="0" bIns="0" rtlCol="0" anchor="t">
+            <a:normAutofit/>
           </a:bodyPr>
           <a:lstStyle/>
           <a:p>
-            <a:pPr algn="l"/>
+            <a:pPr marL="0" indent="0" algn="l">
+              <a:lnSpc>
+                <a:spcPct val="104000"/>
+              </a:lnSpc>
+              <a:buNone/>
+            </a:pPr>
             <a:r>
-              <a:rPr sz="1000" b="0" i="1">
+              <a:rPr lang="en-US" sz="1250" dirty="0">
                 <a:solidFill>
-                  <a:srgbClr val="555555"/>
+                  <a:srgbClr val="DAD8E9"/>
                 </a:solidFill>
-                <a:latin typeface="Calibri"/>
+                <a:latin typeface="Prompt Medium" pitchFamily="34" charset="0"/>
+                <a:ea typeface="Prompt Medium" pitchFamily="34" charset="-122"/>
+                <a:cs typeface="Prompt Medium" pitchFamily="34" charset="-120"/>
               </a:rPr>
-              <a:t>M2 (Random Search) uses 4–13 features and achieves very high MIMIC test-set lift. On EHRSHOT (unseen Stanford data) that advantage nearly vanishes. M5 (Seeded GP, 3–6 features) is more consistent across both datasets.</a:t>
+              <a:t>Mathematical Structure &gt; Feature Selection</a:t>
             </a:r>
+            <a:endParaRPr lang="en-US" sz="1250" dirty="0"/>
           </a:p>
         </p:txBody>
       </p:sp>
       <p:pic>
         <p:nvPicPr>
-          <p:cNvPr id="4" name="Picture 3" descr="image.png"/>
+          <p:cNvPr id="8" name="Image 2" descr="preencoded.png"/>
           <p:cNvPicPr>
             <a:picLocks noChangeAspect="1"/>
           </p:cNvPicPr>
           <p:nvPr/>
         </p:nvPicPr>
         <p:blipFill>
-          <a:blip r:embed="rId2"/>
+          <a:blip>
+            <a:extLst>
+              <a:ext uri="{96DAC541-7B7A-43D3-8B79-37D633B846F1}">
+                <asvg:svgBlip xmlns:asvg="http://schemas.microsoft.com/office/drawing/2016/SVG/main" r:embed="rId4"/>
+              </a:ext>
+            </a:extLst>
+          </a:blip>
           <a:stretch>
             <a:fillRect/>
           </a:stretch>
         </p:blipFill>
         <p:spPr>
           <a:xfrm>
-            <a:off x="182880" y="1097280"/>
-            <a:ext cx="11887200" cy="5029200"/>
+            <a:off x="3861299" y="1607840"/>
+            <a:ext cx="3024310" cy="1821755"/>
           </a:xfrm>
           <a:prstGeom prst="rect">
             <a:avLst/>
@@ -1870,36 +2349,278 @@
       </p:pic>
       <p:sp>
         <p:nvSpPr>
-          <p:cNvPr id="5" name="TextBox 4"/>
-          <p:cNvSpPr txBox="1"/>
-          <p:nvPr/>
-        </p:nvSpPr>
-        <p:spPr>
-          <a:xfrm>
-            <a:off x="457200" y="6217920"/>
-            <a:ext cx="11247120" cy="365760"/>
+          <p:cNvPr id="9" name="Text 4"/>
+          <p:cNvSpPr/>
+          <p:nvPr/>
+        </p:nvSpPr>
+        <p:spPr>
+          <a:xfrm>
+            <a:off x="5285350" y="1717973"/>
+            <a:ext cx="176208" cy="220266"/>
           </a:xfrm>
           <a:prstGeom prst="rect">
             <a:avLst/>
           </a:prstGeom>
           <a:noFill/>
-        </p:spPr>
-        <p:txBody>
-          <a:bodyPr wrap="square">
-            <a:spAutoFit/>
+          <a:ln/>
+        </p:spPr>
+        <p:txBody>
+          <a:bodyPr wrap="none" lIns="0" tIns="0" rIns="0" bIns="0" rtlCol="0" anchor="ctr"/>
+          <a:lstStyle/>
+          <a:p>
+            <a:pPr marL="0" indent="0" algn="ctr">
+              <a:lnSpc>
+                <a:spcPct val="100000"/>
+              </a:lnSpc>
+              <a:buNone/>
+            </a:pPr>
+            <a:r>
+              <a:rPr lang="en-US" sz="1350" dirty="0">
+                <a:solidFill>
+                  <a:srgbClr val="FFFFFF"/>
+                </a:solidFill>
+                <a:latin typeface="Prompt Medium" pitchFamily="34" charset="0"/>
+                <a:ea typeface="Prompt Medium" pitchFamily="34" charset="-122"/>
+                <a:cs typeface="Prompt Medium" pitchFamily="34" charset="-120"/>
+              </a:rPr>
+              <a:t>2</a:t>
+            </a:r>
+            <a:endParaRPr lang="en-US" sz="1350" dirty="0"/>
+          </a:p>
+        </p:txBody>
+      </p:sp>
+      <p:sp>
+        <p:nvSpPr>
+          <p:cNvPr id="10" name="Text 5"/>
+          <p:cNvSpPr/>
+          <p:nvPr/>
+        </p:nvSpPr>
+        <p:spPr>
+          <a:xfrm>
+            <a:off x="4027188" y="2195215"/>
+            <a:ext cx="2013793" cy="203994"/>
+          </a:xfrm>
+          <a:prstGeom prst="rect">
+            <a:avLst/>
+          </a:prstGeom>
+          <a:noFill/>
+          <a:ln/>
+        </p:spPr>
+        <p:txBody>
+          <a:bodyPr wrap="none" lIns="0" tIns="0" rIns="0" bIns="0" rtlCol="0" anchor="t"/>
+          <a:lstStyle/>
+          <a:p>
+            <a:pPr marL="0" indent="0" algn="l">
+              <a:lnSpc>
+                <a:spcPct val="104000"/>
+              </a:lnSpc>
+              <a:buNone/>
+            </a:pPr>
+            <a:r>
+              <a:rPr lang="en-US" sz="1250" dirty="0">
+                <a:solidFill>
+                  <a:srgbClr val="DAD8E9"/>
+                </a:solidFill>
+                <a:latin typeface="Prompt Medium" pitchFamily="34" charset="0"/>
+                <a:ea typeface="Prompt Medium" pitchFamily="34" charset="-122"/>
+                <a:cs typeface="Prompt Medium" pitchFamily="34" charset="-120"/>
+              </a:rPr>
+              <a:t>Evolutionary Search Wins</a:t>
+            </a:r>
+            <a:endParaRPr lang="en-US" sz="1250" dirty="0"/>
+          </a:p>
+        </p:txBody>
+      </p:sp>
+      <p:sp>
+        <p:nvSpPr>
+          <p:cNvPr id="11" name="Text 6"/>
+          <p:cNvSpPr/>
+          <p:nvPr/>
+        </p:nvSpPr>
+        <p:spPr>
+          <a:xfrm>
+            <a:off x="4027188" y="2460823"/>
+            <a:ext cx="2692531" cy="798513"/>
+          </a:xfrm>
+          <a:prstGeom prst="rect">
+            <a:avLst/>
+          </a:prstGeom>
+          <a:noFill/>
+          <a:ln/>
+        </p:spPr>
+        <p:txBody>
+          <a:bodyPr wrap="square" lIns="0" tIns="0" rIns="0" bIns="0" rtlCol="0" anchor="t">
+            <a:normAutofit/>
           </a:bodyPr>
           <a:lstStyle/>
           <a:p>
-            <a:pPr algn="l"/>
+            <a:pPr marL="0" indent="0" algn="l">
+              <a:lnSpc>
+                <a:spcPct val="113000"/>
+              </a:lnSpc>
+              <a:buNone/>
+            </a:pPr>
             <a:r>
-              <a:rPr sz="900" b="0" i="1">
+              <a:rPr lang="en-US" sz="1150" dirty="0">
                 <a:solidFill>
-                  <a:srgbClr val="555555"/>
+                  <a:srgbClr val="DAD8E9"/>
                 </a:solidFill>
-                <a:latin typeface="Calibri"/>
+                <a:latin typeface="Mukta Light" pitchFamily="34" charset="0"/>
+                <a:ea typeface="Mukta Light" pitchFamily="34" charset="-122"/>
+                <a:cs typeface="Mukta Light" pitchFamily="34" charset="-120"/>
               </a:rPr>
-              <a:t>Features used:  RA: M2=9, M5=4   |   Crohn: M2=13, M5=4   |   T1D: M2=6, M5=9   |   Psoriasis: M2=4, M5=3   |   Lupus: M2=8, M5=6</a:t>
+              <a:t>GP beat all methods including a medical LLM. 50,000 structured evaluations over 100 generations found what random attempts and expert heuristics couldn't.</a:t>
             </a:r>
+            <a:endParaRPr lang="en-US" sz="1150" dirty="0"/>
+          </a:p>
+        </p:txBody>
+      </p:sp>
+      <p:pic>
+        <p:nvPicPr>
+          <p:cNvPr id="12" name="Image 3" descr="preencoded.png"/>
+          <p:cNvPicPr>
+            <a:picLocks noChangeAspect="1"/>
+          </p:cNvPicPr>
+          <p:nvPr/>
+        </p:nvPicPr>
+        <p:blipFill>
+          <a:blip>
+            <a:extLst>
+              <a:ext uri="{96DAC541-7B7A-43D3-8B79-37D633B846F1}">
+                <asvg:svgBlip xmlns:asvg="http://schemas.microsoft.com/office/drawing/2016/SVG/main" r:embed="rId5"/>
+              </a:ext>
+            </a:extLst>
+          </a:blip>
+          <a:stretch>
+            <a:fillRect/>
+          </a:stretch>
+        </p:blipFill>
+        <p:spPr>
+          <a:xfrm>
+            <a:off x="734200" y="3532386"/>
+            <a:ext cx="6151409" cy="1418134"/>
+          </a:xfrm>
+          <a:prstGeom prst="rect">
+            <a:avLst/>
+          </a:prstGeom>
+        </p:spPr>
+      </p:pic>
+      <p:sp>
+        <p:nvSpPr>
+          <p:cNvPr id="13" name="Text 7"/>
+          <p:cNvSpPr/>
+          <p:nvPr/>
+        </p:nvSpPr>
+        <p:spPr>
+          <a:xfrm>
+            <a:off x="3721801" y="3642519"/>
+            <a:ext cx="176208" cy="220266"/>
+          </a:xfrm>
+          <a:prstGeom prst="rect">
+            <a:avLst/>
+          </a:prstGeom>
+          <a:noFill/>
+          <a:ln/>
+        </p:spPr>
+        <p:txBody>
+          <a:bodyPr wrap="none" lIns="0" tIns="0" rIns="0" bIns="0" rtlCol="0" anchor="ctr"/>
+          <a:lstStyle/>
+          <a:p>
+            <a:pPr marL="0" indent="0" algn="ctr">
+              <a:lnSpc>
+                <a:spcPct val="100000"/>
+              </a:lnSpc>
+              <a:buNone/>
+            </a:pPr>
+            <a:r>
+              <a:rPr lang="en-US" sz="1350" dirty="0">
+                <a:solidFill>
+                  <a:srgbClr val="FFFFFF"/>
+                </a:solidFill>
+                <a:latin typeface="Prompt Medium" pitchFamily="34" charset="0"/>
+                <a:ea typeface="Prompt Medium" pitchFamily="34" charset="-122"/>
+                <a:cs typeface="Prompt Medium" pitchFamily="34" charset="-120"/>
+              </a:rPr>
+              <a:t>3</a:t>
+            </a:r>
+            <a:endParaRPr lang="en-US" sz="1350" dirty="0"/>
+          </a:p>
+        </p:txBody>
+      </p:sp>
+      <p:sp>
+        <p:nvSpPr>
+          <p:cNvPr id="14" name="Text 8"/>
+          <p:cNvSpPr/>
+          <p:nvPr/>
+        </p:nvSpPr>
+        <p:spPr>
+          <a:xfrm>
+            <a:off x="900090" y="4119761"/>
+            <a:ext cx="2780139" cy="203994"/>
+          </a:xfrm>
+          <a:prstGeom prst="rect">
+            <a:avLst/>
+          </a:prstGeom>
+          <a:noFill/>
+          <a:ln/>
+        </p:spPr>
+        <p:txBody>
+          <a:bodyPr wrap="none" lIns="0" tIns="0" rIns="0" bIns="0" rtlCol="0" anchor="t"/>
+          <a:lstStyle/>
+          <a:p>
+            <a:pPr marL="0" indent="0" algn="l">
+              <a:lnSpc>
+                <a:spcPct val="104000"/>
+              </a:lnSpc>
+              <a:buNone/>
+            </a:pPr>
+            <a:r>
+              <a:rPr lang="en-US" sz="1250" dirty="0">
+                <a:solidFill>
+                  <a:srgbClr val="DAD8E9"/>
+                </a:solidFill>
+                <a:latin typeface="Prompt Medium" pitchFamily="34" charset="0"/>
+                <a:ea typeface="Prompt Medium" pitchFamily="34" charset="-122"/>
+                <a:cs typeface="Prompt Medium" pitchFamily="34" charset="-120"/>
+              </a:rPr>
+              <a:t>The Framework Is the Contribution</a:t>
+            </a:r>
+            <a:endParaRPr lang="en-US" sz="1250" dirty="0"/>
+          </a:p>
+        </p:txBody>
+      </p:sp>
+      <p:sp>
+        <p:nvSpPr>
+          <p:cNvPr id="16" name="Text 10"/>
+          <p:cNvSpPr/>
+          <p:nvPr/>
+        </p:nvSpPr>
+        <p:spPr>
+          <a:xfrm>
+            <a:off x="734200" y="5181699"/>
+            <a:ext cx="5931148" cy="399256"/>
+          </a:xfrm>
+          <a:prstGeom prst="rect">
+            <a:avLst/>
+          </a:prstGeom>
+          <a:noFill/>
+          <a:ln/>
+        </p:spPr>
+        <p:txBody>
+          <a:bodyPr wrap="square" lIns="0" tIns="0" rIns="0" bIns="0" rtlCol="0" anchor="t">
+            <a:normAutofit/>
+          </a:bodyPr>
+          <a:lstStyle/>
+          <a:p>
+            <a:pPr marL="0" indent="0" algn="r" rtl="1">
+              <a:lnSpc>
+                <a:spcPct val="113000"/>
+              </a:lnSpc>
+              <a:buNone/>
+            </a:pPr>
+            <a:endParaRPr lang="he-IL" sz="1150" dirty="0">
+              <a:latin typeface="+mj-lt"/>
+            </a:endParaRPr>
           </a:p>
         </p:txBody>
       </p:sp>
@@ -2005,6 +2726,293 @@
 </file>
 
 <file path=ppt/slides/slide3.xml><?xml version="1.0" encoding="utf-8"?>
+<p:sld xmlns:a="http://schemas.openxmlformats.org/drawingml/2006/main" xmlns:r="http://schemas.openxmlformats.org/officeDocument/2006/relationships" xmlns:p="http://schemas.openxmlformats.org/presentationml/2006/main">
+  <p:cSld>
+    <p:spTree>
+      <p:nvGrpSpPr>
+        <p:cNvPr id="1" name=""/>
+        <p:cNvGrpSpPr/>
+        <p:nvPr/>
+      </p:nvGrpSpPr>
+      <p:grpSpPr>
+        <a:xfrm>
+          <a:off x="0" y="0"/>
+          <a:ext cx="0" cy="0"/>
+          <a:chOff x="0" y="0"/>
+          <a:chExt cx="0" cy="0"/>
+        </a:xfrm>
+      </p:grpSpPr>
+      <p:sp>
+        <p:nvSpPr>
+          <p:cNvPr id="2" name="TextBox 1"/>
+          <p:cNvSpPr txBox="1"/>
+          <p:nvPr/>
+        </p:nvSpPr>
+        <p:spPr>
+          <a:xfrm>
+            <a:off x="457200" y="411480"/>
+            <a:ext cx="11247120" cy="594360"/>
+          </a:xfrm>
+          <a:prstGeom prst="rect">
+            <a:avLst/>
+          </a:prstGeom>
+          <a:noFill/>
+        </p:spPr>
+        <p:txBody>
+          <a:bodyPr wrap="square">
+            <a:spAutoFit/>
+          </a:bodyPr>
+          <a:lstStyle/>
+          <a:p>
+            <a:pPr algn="l"/>
+            <a:r>
+              <a:rPr sz="2600" b="1" i="0">
+                <a:solidFill>
+                  <a:srgbClr val="1F397D"/>
+                </a:solidFill>
+                <a:latin typeface="Calibri"/>
+              </a:rPr>
+              <a:t>Why Rheumatoid Arthritis?</a:t>
+            </a:r>
+          </a:p>
+        </p:txBody>
+      </p:sp>
+      <p:sp>
+        <p:nvSpPr>
+          <p:cNvPr id="3" name="Rectangle 2"/>
+          <p:cNvSpPr/>
+          <p:nvPr/>
+        </p:nvSpPr>
+        <p:spPr>
+          <a:xfrm>
+            <a:off x="457200" y="1051560"/>
+            <a:ext cx="11247120" cy="36576"/>
+          </a:xfrm>
+          <a:prstGeom prst="rect">
+            <a:avLst/>
+          </a:prstGeom>
+          <a:solidFill>
+            <a:srgbClr val="1F397D"/>
+          </a:solidFill>
+          <a:ln>
+            <a:noFill/>
+          </a:ln>
+        </p:spPr>
+        <p:style>
+          <a:lnRef idx="1">
+            <a:schemeClr val="accent1"/>
+          </a:lnRef>
+          <a:fillRef idx="3">
+            <a:schemeClr val="accent1"/>
+          </a:fillRef>
+          <a:effectRef idx="2">
+            <a:schemeClr val="accent1"/>
+          </a:effectRef>
+          <a:fontRef idx="minor">
+            <a:schemeClr val="lt1"/>
+          </a:fontRef>
+        </p:style>
+        <p:txBody>
+          <a:bodyPr rtlCol="0" anchor="ctr"/>
+          <a:lstStyle/>
+          <a:p>
+            <a:pPr algn="ctr"/>
+            <a:endParaRPr/>
+          </a:p>
+        </p:txBody>
+      </p:sp>
+      <p:sp>
+        <p:nvSpPr>
+          <p:cNvPr id="4" name="TextBox 3"/>
+          <p:cNvSpPr txBox="1"/>
+          <p:nvPr/>
+        </p:nvSpPr>
+        <p:spPr>
+          <a:xfrm>
+            <a:off x="457200" y="1188720"/>
+            <a:ext cx="5303520" cy="274320"/>
+          </a:xfrm>
+          <a:prstGeom prst="rect">
+            <a:avLst/>
+          </a:prstGeom>
+          <a:noFill/>
+        </p:spPr>
+        <p:txBody>
+          <a:bodyPr wrap="square">
+            <a:spAutoFit/>
+          </a:bodyPr>
+          <a:lstStyle/>
+          <a:p>
+            <a:pPr algn="l"/>
+            <a:r>
+              <a:rPr sz="1100" b="1" i="0">
+                <a:solidFill>
+                  <a:srgbClr val="1F397D"/>
+                </a:solidFill>
+                <a:latin typeface="Calibri"/>
+              </a:rPr>
+              <a:t>THE DISEASE</a:t>
+            </a:r>
+          </a:p>
+        </p:txBody>
+      </p:sp>
+      <p:sp>
+        <p:nvSpPr>
+          <p:cNvPr id="5" name="TextBox 4"/>
+          <p:cNvSpPr txBox="1"/>
+          <p:nvPr/>
+        </p:nvSpPr>
+        <p:spPr>
+          <a:xfrm>
+            <a:off x="457200" y="1508760"/>
+            <a:ext cx="5303520" cy="2194560"/>
+          </a:xfrm>
+          <a:prstGeom prst="rect">
+            <a:avLst/>
+          </a:prstGeom>
+          <a:noFill/>
+        </p:spPr>
+        <p:txBody>
+          <a:bodyPr wrap="square">
+            <a:spAutoFit/>
+          </a:bodyPr>
+          <a:lstStyle/>
+          <a:p>
+            <a:pPr algn="l"/>
+            <a:r>
+              <a:rPr sz="1200" b="0" i="0">
+                <a:solidFill>
+                  <a:srgbClr val="222222"/>
+                </a:solidFill>
+                <a:latin typeface="Calibri"/>
+              </a:rPr>
+              <a:t>Rheumatoid Arthritis is a systemic autoimmune disease affecting ~1% of adults worldwide, causing progressive joint damage and systemic inflammation.
+Diagnosis is often delayed 1–2 years: early symptoms are non-specific, and confirmation requires specialist referral, anti-CCP serology, and imaging — resources not always available in primary care.
+Early treatment (within 3–6 months of onset) dramatically slows joint destruction. Each month of delay worsens long-term outcomes.</a:t>
+            </a:r>
+          </a:p>
+        </p:txBody>
+      </p:sp>
+      <p:sp>
+        <p:nvSpPr>
+          <p:cNvPr id="6" name="TextBox 5"/>
+          <p:cNvSpPr txBox="1"/>
+          <p:nvPr/>
+        </p:nvSpPr>
+        <p:spPr>
+          <a:xfrm>
+            <a:off x="6217920" y="1188720"/>
+            <a:ext cx="5394960" cy="274320"/>
+          </a:xfrm>
+          <a:prstGeom prst="rect">
+            <a:avLst/>
+          </a:prstGeom>
+          <a:noFill/>
+        </p:spPr>
+        <p:txBody>
+          <a:bodyPr wrap="square">
+            <a:spAutoFit/>
+          </a:bodyPr>
+          <a:lstStyle/>
+          <a:p>
+            <a:pPr algn="l"/>
+            <a:r>
+              <a:rPr sz="1100" b="1" i="0">
+                <a:solidFill>
+                  <a:srgbClr val="1F397D"/>
+                </a:solidFill>
+                <a:latin typeface="Calibri"/>
+              </a:rPr>
+              <a:t>WHY A CBC BIOMARKER?</a:t>
+            </a:r>
+          </a:p>
+        </p:txBody>
+      </p:sp>
+      <p:sp>
+        <p:nvSpPr>
+          <p:cNvPr id="7" name="TextBox 6"/>
+          <p:cNvSpPr txBox="1"/>
+          <p:nvPr/>
+        </p:nvSpPr>
+        <p:spPr>
+          <a:xfrm>
+            <a:off x="6217920" y="1508760"/>
+            <a:ext cx="5394960" cy="3840480"/>
+          </a:xfrm>
+          <a:prstGeom prst="rect">
+            <a:avLst/>
+          </a:prstGeom>
+          <a:noFill/>
+        </p:spPr>
+        <p:txBody>
+          <a:bodyPr wrap="square">
+            <a:spAutoFit/>
+          </a:bodyPr>
+          <a:lstStyle/>
+          <a:p>
+            <a:pPr algn="l"/>
+            <a:r>
+              <a:rPr sz="1200" b="0" i="0">
+                <a:solidFill>
+                  <a:srgbClr val="222222"/>
+                </a:solidFill>
+                <a:latin typeface="Calibri"/>
+              </a:rPr>
+              <a:t>A Complete Blood Count is ordered in virtually every routine hospital visit — cheap (~$15), fast, and universally available.
+A CBC-based alert could flag patients for specialist referral before symptoms are clinically obvious, closing the diagnosis gap in primary care.
+Why does CBC carry RA signal?
+• Chronic inflammation ↑ monocyte %  —  monocytes are key mediators of RA synovial inflammation
+• Inflammation suppresses red cell production → anemia of chronic disease  (↓ hematocrit, ↓ MCHC)
+• These signals appear directly in the winning formula:
+    (mono_pct / neut_pct)² × log(hct − mchc)</a:t>
+            </a:r>
+          </a:p>
+        </p:txBody>
+      </p:sp>
+      <p:sp>
+        <p:nvSpPr>
+          <p:cNvPr id="8" name="TextBox 7"/>
+          <p:cNvSpPr txBox="1"/>
+          <p:nvPr/>
+        </p:nvSpPr>
+        <p:spPr>
+          <a:xfrm>
+            <a:off x="457200" y="6309360"/>
+            <a:ext cx="11247120" cy="320040"/>
+          </a:xfrm>
+          <a:prstGeom prst="rect">
+            <a:avLst/>
+          </a:prstGeom>
+          <a:noFill/>
+        </p:spPr>
+        <p:txBody>
+          <a:bodyPr wrap="square">
+            <a:spAutoFit/>
+          </a:bodyPr>
+          <a:lstStyle/>
+          <a:p>
+            <a:pPr algn="l"/>
+            <a:r>
+              <a:rPr sz="1000" b="0" i="1">
+                <a:solidFill>
+                  <a:srgbClr val="777777"/>
+                </a:solidFill>
+                <a:latin typeface="Calibri"/>
+              </a:rPr>
+              <a:t>Focus disease throughout this presentation. Results for all 6 diseases shown in the multi-disease summary slide.</a:t>
+            </a:r>
+          </a:p>
+        </p:txBody>
+      </p:sp>
+    </p:spTree>
+  </p:cSld>
+  <p:clrMapOvr>
+    <a:masterClrMapping/>
+  </p:clrMapOvr>
+</p:sld>
+</file>
+
+<file path=ppt/slides/slide4.xml><?xml version="1.0" encoding="utf-8"?>
 <p:sld xmlns:a="http://schemas.openxmlformats.org/drawingml/2006/main" xmlns:r="http://schemas.openxmlformats.org/officeDocument/2006/relationships" xmlns:p="http://schemas.openxmlformats.org/presentationml/2006/main">
   <p:cSld name="Slide 3">
     <p:spTree>
@@ -4207,7 +5215,7 @@
 </p:sld>
 </file>
 
-<file path=ppt/slides/slide4.xml><?xml version="1.0" encoding="utf-8"?>
+<file path=ppt/slides/slide5.xml><?xml version="1.0" encoding="utf-8"?>
 <p:sld xmlns:a="http://schemas.openxmlformats.org/drawingml/2006/main" xmlns:r="http://schemas.openxmlformats.org/officeDocument/2006/relationships" xmlns:p="http://schemas.openxmlformats.org/presentationml/2006/main">
   <p:cSld>
     <p:spTree>
@@ -7438,7 +8446,7 @@
 </p:sld>
 </file>
 
-<file path=ppt/slides/slide5.xml><?xml version="1.0" encoding="utf-8"?>
+<file path=ppt/slides/slide6.xml><?xml version="1.0" encoding="utf-8"?>
 <p:sld xmlns:a="http://schemas.openxmlformats.org/drawingml/2006/main" xmlns:r="http://schemas.openxmlformats.org/officeDocument/2006/relationships" xmlns:p="http://schemas.openxmlformats.org/presentationml/2006/main">
   <p:cSld name="Slide 6">
     <p:spTree>
@@ -8082,7 +9090,7 @@
 </p:sld>
 </file>
 
-<file path=ppt/slides/slide6.xml><?xml version="1.0" encoding="utf-8"?>
+<file path=ppt/slides/slide7.xml><?xml version="1.0" encoding="utf-8"?>
 <p:sld xmlns:a="http://schemas.openxmlformats.org/drawingml/2006/main" xmlns:r="http://schemas.openxmlformats.org/officeDocument/2006/relationships" xmlns:p="http://schemas.openxmlformats.org/presentationml/2006/main">
   <p:cSld name="Slide 7">
     <p:spTree>
@@ -11646,9 +12654,9 @@
 </p:sld>
 </file>
 
-<file path=ppt/slides/slide7.xml><?xml version="1.0" encoding="utf-8"?>
+<file path=ppt/slides/slide8.xml><?xml version="1.0" encoding="utf-8"?>
 <p:sld xmlns:a="http://schemas.openxmlformats.org/drawingml/2006/main" xmlns:r="http://schemas.openxmlformats.org/officeDocument/2006/relationships" xmlns:p="http://schemas.openxmlformats.org/presentationml/2006/main">
-  <p:cSld name="Slide 9">
+  <p:cSld>
     <p:spTree>
       <p:nvGrpSpPr>
         <p:cNvPr id="1" name=""/>
@@ -11663,447 +12671,21 @@
           <a:chExt cx="0" cy="0"/>
         </a:xfrm>
       </p:grpSpPr>
-      <p:pic>
-        <p:nvPicPr>
-          <p:cNvPr id="2" name="Image 0" descr="preencoded.png"/>
-          <p:cNvPicPr>
-            <a:picLocks noChangeAspect="1"/>
-          </p:cNvPicPr>
-          <p:nvPr/>
-        </p:nvPicPr>
-        <p:blipFill>
-          <a:blip r:embed="rId3"/>
-          <a:stretch>
-            <a:fillRect/>
-          </a:stretch>
-        </p:blipFill>
-        <p:spPr>
-          <a:xfrm>
-            <a:off x="7619809" y="0"/>
-            <a:ext cx="4571886" cy="6858000"/>
-          </a:xfrm>
-          <a:prstGeom prst="rect">
-            <a:avLst/>
-          </a:prstGeom>
-        </p:spPr>
-      </p:pic>
-      <p:sp>
-        <p:nvSpPr>
-          <p:cNvPr id="3" name="Text 0"/>
-          <p:cNvSpPr/>
-          <p:nvPr/>
-        </p:nvSpPr>
-        <p:spPr>
-          <a:xfrm>
-            <a:off x="734200" y="895945"/>
-            <a:ext cx="6151409" cy="990600"/>
+      <p:sp>
+        <p:nvSpPr>
+          <p:cNvPr id="2" name="TextBox 1"/>
+          <p:cNvSpPr txBox="1"/>
+          <p:nvPr/>
+        </p:nvSpPr>
+        <p:spPr>
+          <a:xfrm>
+            <a:off x="457200" y="274320"/>
+            <a:ext cx="11247120" cy="502920"/>
           </a:xfrm>
           <a:prstGeom prst="rect">
             <a:avLst/>
           </a:prstGeom>
           <a:noFill/>
-          <a:ln/>
-        </p:spPr>
-        <p:txBody>
-          <a:bodyPr wrap="square" lIns="0" tIns="0" rIns="0" bIns="0" rtlCol="0" anchor="t">
-            <a:normAutofit/>
-          </a:bodyPr>
-          <a:lstStyle/>
-          <a:p>
-            <a:pPr marL="0" indent="0" algn="l">
-              <a:lnSpc>
-                <a:spcPct val="104000"/>
-              </a:lnSpc>
-              <a:buNone/>
-            </a:pPr>
-            <a:r>
-              <a:rPr lang="en-US" sz="3100" dirty="0">
-                <a:solidFill>
-                  <a:srgbClr val="C6BFEE"/>
-                </a:solidFill>
-                <a:latin typeface="Prompt Medium" pitchFamily="34" charset="0"/>
-                <a:ea typeface="Prompt Medium" pitchFamily="34" charset="-122"/>
-                <a:cs typeface="Prompt Medium" pitchFamily="34" charset="-120"/>
-              </a:rPr>
-              <a:t>External Validation &amp; Generalization</a:t>
-            </a:r>
-            <a:endParaRPr lang="en-US" sz="3100" dirty="0"/>
-          </a:p>
-        </p:txBody>
-      </p:sp>
-      <p:sp>
-        <p:nvSpPr>
-          <p:cNvPr id="5" name="Shape 2"/>
-          <p:cNvSpPr/>
-          <p:nvPr/>
-        </p:nvSpPr>
-        <p:spPr>
-          <a:xfrm>
-            <a:off x="734200" y="2811959"/>
-            <a:ext cx="2999903" cy="2026940"/>
-          </a:xfrm>
-          <a:prstGeom prst="roundRect">
-            <a:avLst>
-              <a:gd name="adj" fmla="val 3695"/>
-            </a:avLst>
-          </a:prstGeom>
-          <a:solidFill>
-            <a:srgbClr val="542C49"/>
-          </a:solidFill>
-          <a:ln w="6350">
-            <a:solidFill>
-              <a:srgbClr val="6D4562"/>
-            </a:solidFill>
-            <a:prstDash val="solid"/>
-          </a:ln>
-        </p:spPr>
-        <p:txBody>
-          <a:bodyPr/>
-          <a:lstStyle/>
-          <a:p>
-            <a:endParaRPr lang="LID4096"/>
-          </a:p>
-        </p:txBody>
-      </p:sp>
-      <p:sp>
-        <p:nvSpPr>
-          <p:cNvPr id="6" name="Text 3"/>
-          <p:cNvSpPr/>
-          <p:nvPr/>
-        </p:nvSpPr>
-        <p:spPr>
-          <a:xfrm>
-            <a:off x="918842" y="2996605"/>
-            <a:ext cx="1981349" cy="247650"/>
-          </a:xfrm>
-          <a:prstGeom prst="rect">
-            <a:avLst/>
-          </a:prstGeom>
-          <a:noFill/>
-          <a:ln/>
-        </p:spPr>
-        <p:txBody>
-          <a:bodyPr wrap="none" lIns="0" tIns="0" rIns="0" bIns="0" rtlCol="0" anchor="t"/>
-          <a:lstStyle/>
-          <a:p>
-            <a:pPr marL="0" indent="0" algn="l">
-              <a:lnSpc>
-                <a:spcPct val="104000"/>
-              </a:lnSpc>
-              <a:buNone/>
-            </a:pPr>
-            <a:r>
-              <a:rPr lang="en-US" sz="1550" dirty="0">
-                <a:solidFill>
-                  <a:srgbClr val="DAD8E9"/>
-                </a:solidFill>
-                <a:latin typeface="Prompt Medium" pitchFamily="34" charset="0"/>
-                <a:ea typeface="Prompt Medium" pitchFamily="34" charset="-122"/>
-                <a:cs typeface="Prompt Medium" pitchFamily="34" charset="-120"/>
-              </a:rPr>
-              <a:t>MIMIC-IV</a:t>
-            </a:r>
-            <a:endParaRPr lang="en-US" sz="1550" dirty="0"/>
-          </a:p>
-        </p:txBody>
-      </p:sp>
-      <p:sp>
-        <p:nvSpPr>
-          <p:cNvPr id="7" name="Text 4"/>
-          <p:cNvSpPr/>
-          <p:nvPr/>
-        </p:nvSpPr>
-        <p:spPr>
-          <a:xfrm>
-            <a:off x="918842" y="3335139"/>
-            <a:ext cx="2630620" cy="791468"/>
-          </a:xfrm>
-          <a:prstGeom prst="rect">
-            <a:avLst/>
-          </a:prstGeom>
-          <a:noFill/>
-          <a:ln/>
-        </p:spPr>
-        <p:txBody>
-          <a:bodyPr wrap="square" lIns="0" tIns="0" rIns="0" bIns="0" rtlCol="0" anchor="t">
-            <a:normAutofit/>
-          </a:bodyPr>
-          <a:lstStyle/>
-          <a:p>
-            <a:pPr marL="0" indent="0" algn="l">
-              <a:lnSpc>
-                <a:spcPct val="123000"/>
-              </a:lnSpc>
-              <a:buNone/>
-            </a:pPr>
-            <a:r>
-              <a:rPr lang="en-US" sz="1400" dirty="0">
-                <a:solidFill>
-                  <a:srgbClr val="DAD8E9"/>
-                </a:solidFill>
-                <a:latin typeface="Mukta Light" pitchFamily="34" charset="0"/>
-                <a:ea typeface="Mukta Light" pitchFamily="34" charset="-122"/>
-                <a:cs typeface="Mukta Light" pitchFamily="34" charset="-120"/>
-              </a:rPr>
-              <a:t>Train + internal test. ~223K patients, 6 diseases. Bootstrap CI (n=1,000).</a:t>
-            </a:r>
-            <a:endParaRPr lang="en-US" sz="1400" dirty="0"/>
-          </a:p>
-        </p:txBody>
-      </p:sp>
-      <p:sp>
-        <p:nvSpPr>
-          <p:cNvPr id="8" name="Shape 5"/>
-          <p:cNvSpPr/>
-          <p:nvPr/>
-        </p:nvSpPr>
-        <p:spPr>
-          <a:xfrm>
-            <a:off x="3885607" y="2811959"/>
-            <a:ext cx="3000002" cy="2026940"/>
-          </a:xfrm>
-          <a:prstGeom prst="roundRect">
-            <a:avLst>
-              <a:gd name="adj" fmla="val 3695"/>
-            </a:avLst>
-          </a:prstGeom>
-          <a:solidFill>
-            <a:srgbClr val="542C49"/>
-          </a:solidFill>
-          <a:ln w="6350">
-            <a:solidFill>
-              <a:srgbClr val="6D4562"/>
-            </a:solidFill>
-            <a:prstDash val="solid"/>
-          </a:ln>
-        </p:spPr>
-        <p:txBody>
-          <a:bodyPr/>
-          <a:lstStyle/>
-          <a:p>
-            <a:endParaRPr lang="LID4096"/>
-          </a:p>
-        </p:txBody>
-      </p:sp>
-      <p:sp>
-        <p:nvSpPr>
-          <p:cNvPr id="9" name="Text 6"/>
-          <p:cNvSpPr/>
-          <p:nvPr/>
-        </p:nvSpPr>
-        <p:spPr>
-          <a:xfrm>
-            <a:off x="4070248" y="2996605"/>
-            <a:ext cx="1981349" cy="247650"/>
-          </a:xfrm>
-          <a:prstGeom prst="rect">
-            <a:avLst/>
-          </a:prstGeom>
-          <a:noFill/>
-          <a:ln/>
-        </p:spPr>
-        <p:txBody>
-          <a:bodyPr wrap="none" lIns="0" tIns="0" rIns="0" bIns="0" rtlCol="0" anchor="t"/>
-          <a:lstStyle/>
-          <a:p>
-            <a:pPr marL="0" indent="0" algn="l">
-              <a:lnSpc>
-                <a:spcPct val="104000"/>
-              </a:lnSpc>
-              <a:buNone/>
-            </a:pPr>
-            <a:r>
-              <a:rPr lang="en-US" sz="1550" dirty="0">
-                <a:solidFill>
-                  <a:srgbClr val="DAD8E9"/>
-                </a:solidFill>
-                <a:latin typeface="Prompt Medium" pitchFamily="34" charset="0"/>
-                <a:ea typeface="Prompt Medium" pitchFamily="34" charset="-122"/>
-                <a:cs typeface="Prompt Medium" pitchFamily="34" charset="-120"/>
-              </a:rPr>
-              <a:t>NHANES</a:t>
-            </a:r>
-            <a:endParaRPr lang="en-US" sz="1550" dirty="0"/>
-          </a:p>
-        </p:txBody>
-      </p:sp>
-      <p:sp>
-        <p:nvSpPr>
-          <p:cNvPr id="10" name="Text 7"/>
-          <p:cNvSpPr/>
-          <p:nvPr/>
-        </p:nvSpPr>
-        <p:spPr>
-          <a:xfrm>
-            <a:off x="4070248" y="3335139"/>
-            <a:ext cx="2630719" cy="1319113"/>
-          </a:xfrm>
-          <a:prstGeom prst="rect">
-            <a:avLst/>
-          </a:prstGeom>
-          <a:noFill/>
-          <a:ln/>
-        </p:spPr>
-        <p:txBody>
-          <a:bodyPr wrap="square" lIns="0" tIns="0" rIns="0" bIns="0" rtlCol="0" anchor="t">
-            <a:normAutofit/>
-          </a:bodyPr>
-          <a:lstStyle/>
-          <a:p>
-            <a:pPr marL="0" indent="0" algn="l">
-              <a:lnSpc>
-                <a:spcPct val="123000"/>
-              </a:lnSpc>
-              <a:buNone/>
-            </a:pPr>
-            <a:r>
-              <a:rPr lang="en-US" sz="1400" dirty="0">
-                <a:solidFill>
-                  <a:srgbClr val="DAD8E9"/>
-                </a:solidFill>
-                <a:latin typeface="Mukta Light" pitchFamily="34" charset="0"/>
-                <a:ea typeface="Mukta Light" pitchFamily="34" charset="-122"/>
-                <a:cs typeface="Mukta Light" pitchFamily="34" charset="-120"/>
-              </a:rPr>
-              <a:t>US national population survey. External validation for RA and Psoriasis only — other diseases excluded after questionnaire variable audit.</a:t>
-            </a:r>
-            <a:endParaRPr lang="en-US" sz="1400" dirty="0"/>
-          </a:p>
-        </p:txBody>
-      </p:sp>
-      <p:sp>
-        <p:nvSpPr>
-          <p:cNvPr id="11" name="Shape 8"/>
-          <p:cNvSpPr/>
-          <p:nvPr/>
-        </p:nvSpPr>
-        <p:spPr>
-          <a:xfrm>
-            <a:off x="734200" y="4990405"/>
-            <a:ext cx="6151409" cy="971649"/>
-          </a:xfrm>
-          <a:prstGeom prst="roundRect">
-            <a:avLst>
-              <a:gd name="adj" fmla="val 7708"/>
-            </a:avLst>
-          </a:prstGeom>
-          <a:solidFill>
-            <a:srgbClr val="542C49"/>
-          </a:solidFill>
-          <a:ln w="6350">
-            <a:solidFill>
-              <a:srgbClr val="6D4562"/>
-            </a:solidFill>
-            <a:prstDash val="solid"/>
-          </a:ln>
-        </p:spPr>
-        <p:txBody>
-          <a:bodyPr/>
-          <a:lstStyle/>
-          <a:p>
-            <a:endParaRPr lang="LID4096"/>
-          </a:p>
-        </p:txBody>
-      </p:sp>
-      <p:sp>
-        <p:nvSpPr>
-          <p:cNvPr id="12" name="Text 9"/>
-          <p:cNvSpPr/>
-          <p:nvPr/>
-        </p:nvSpPr>
-        <p:spPr>
-          <a:xfrm>
-            <a:off x="918842" y="5175052"/>
-            <a:ext cx="1981349" cy="247650"/>
-          </a:xfrm>
-          <a:prstGeom prst="rect">
-            <a:avLst/>
-          </a:prstGeom>
-          <a:noFill/>
-          <a:ln/>
-        </p:spPr>
-        <p:txBody>
-          <a:bodyPr wrap="none" lIns="0" tIns="0" rIns="0" bIns="0" rtlCol="0" anchor="t"/>
-          <a:lstStyle/>
-          <a:p>
-            <a:pPr marL="0" indent="0" algn="l">
-              <a:lnSpc>
-                <a:spcPct val="104000"/>
-              </a:lnSpc>
-              <a:buNone/>
-            </a:pPr>
-            <a:r>
-              <a:rPr lang="en-US" sz="1550" dirty="0">
-                <a:solidFill>
-                  <a:srgbClr val="DAD8E9"/>
-                </a:solidFill>
-                <a:latin typeface="Prompt Medium" pitchFamily="34" charset="0"/>
-                <a:ea typeface="Prompt Medium" pitchFamily="34" charset="-122"/>
-                <a:cs typeface="Prompt Medium" pitchFamily="34" charset="-120"/>
-              </a:rPr>
-              <a:t>EHRSHOT (Stanford)</a:t>
-            </a:r>
-            <a:endParaRPr lang="en-US" sz="1550" dirty="0"/>
-          </a:p>
-        </p:txBody>
-      </p:sp>
-      <p:sp>
-        <p:nvSpPr>
-          <p:cNvPr id="13" name="Text 10"/>
-          <p:cNvSpPr/>
-          <p:nvPr/>
-        </p:nvSpPr>
-        <p:spPr>
-          <a:xfrm>
-            <a:off x="918842" y="5513586"/>
-            <a:ext cx="5782126" cy="263823"/>
-          </a:xfrm>
-          <a:prstGeom prst="rect">
-            <a:avLst/>
-          </a:prstGeom>
-          <a:noFill/>
-          <a:ln/>
-        </p:spPr>
-        <p:txBody>
-          <a:bodyPr wrap="none" lIns="0" tIns="0" rIns="0" bIns="0" rtlCol="0" anchor="t"/>
-          <a:lstStyle/>
-          <a:p>
-            <a:pPr marL="0" indent="0" algn="l">
-              <a:lnSpc>
-                <a:spcPct val="123000"/>
-              </a:lnSpc>
-              <a:buNone/>
-            </a:pPr>
-            <a:r>
-              <a:rPr lang="en-US" sz="1400" dirty="0">
-                <a:solidFill>
-                  <a:srgbClr val="DAD8E9"/>
-                </a:solidFill>
-                <a:latin typeface="Mukta Light" pitchFamily="34" charset="0"/>
-                <a:ea typeface="Mukta Light" pitchFamily="34" charset="-122"/>
-                <a:cs typeface="Mukta Light" pitchFamily="34" charset="-120"/>
-              </a:rPr>
-              <a:t>External clinical validation. OMOP CDM format, different hospital system.</a:t>
-            </a:r>
-            <a:endParaRPr lang="en-US" sz="1400" dirty="0"/>
-          </a:p>
-        </p:txBody>
-      </p:sp>
-      <p:sp>
-        <p:nvSpPr>
-          <p:cNvPr id="14" name="TextBox 13"/>
-          <p:cNvSpPr txBox="1"/>
-          <p:nvPr/>
-        </p:nvSpPr>
-        <p:spPr>
-          <a:xfrm>
-            <a:off x="457200" y="1417320"/>
-            <a:ext cx="11247120" cy="274320"/>
-          </a:xfrm>
-          <a:prstGeom prst="rect">
-            <a:avLst/>
-          </a:prstGeom>
-          <a:noFill/>
         </p:spPr>
         <p:txBody>
           <a:bodyPr wrap="square">
@@ -12113,51 +12695,27 @@
           <a:p>
             <a:pPr algn="l"/>
             <a:r>
-              <a:rPr sz="1100" b="1" i="0">
+              <a:rPr sz="2200" b="1" i="0">
                 <a:solidFill>
                   <a:srgbClr val="1F397D"/>
                 </a:solidFill>
                 <a:latin typeface="Calibri"/>
               </a:rPr>
-              <a:t>EHRSHOT (Stanford EHR) — AUC-PR Lift  (lift = AUC-PR / cohort prevalence)</a:t>
+              <a:t>AUC-PR Lift Across All 6 Diseases — MIMIC Test Set</a:t>
             </a:r>
           </a:p>
         </p:txBody>
       </p:sp>
-      <p:pic>
-        <p:nvPicPr>
-          <p:cNvPr id="15" name="Picture 14" descr="image.png"/>
-          <p:cNvPicPr>
-            <a:picLocks noChangeAspect="1"/>
-          </p:cNvPicPr>
-          <p:nvPr/>
-        </p:nvPicPr>
-        <p:blipFill>
-          <a:blip r:embed="rId4"/>
-          <a:stretch>
-            <a:fillRect/>
-          </a:stretch>
-        </p:blipFill>
-        <p:spPr>
-          <a:xfrm>
-            <a:off x="274320" y="1737360"/>
-            <a:ext cx="11612880" cy="3931920"/>
-          </a:xfrm>
-          <a:prstGeom prst="rect">
-            <a:avLst/>
-          </a:prstGeom>
-        </p:spPr>
-      </p:pic>
-      <p:sp>
-        <p:nvSpPr>
-          <p:cNvPr id="16" name="TextBox 15"/>
+      <p:sp>
+        <p:nvSpPr>
+          <p:cNvPr id="3" name="TextBox 2"/>
           <p:cNvSpPr txBox="1"/>
           <p:nvPr/>
         </p:nvSpPr>
         <p:spPr>
           <a:xfrm>
-            <a:off x="457200" y="5760720"/>
-            <a:ext cx="11247120" cy="548640"/>
+            <a:off x="457200" y="804672"/>
+            <a:ext cx="11247120" cy="256032"/>
           </a:xfrm>
           <a:prstGeom prst="rect">
             <a:avLst/>
@@ -12172,13 +12730,72 @@
           <a:p>
             <a:pPr algn="l"/>
             <a:r>
-              <a:rPr sz="900" b="0" i="1">
+              <a:rPr sz="1000" b="0" i="1">
                 <a:solidFill>
                   <a:srgbClr val="555555"/>
                 </a:solidFill>
                 <a:latin typeface="Calibri"/>
               </a:rPr>
-              <a:t>NHANES (US population survey, RA + Psoriasis only): RA AUC-PR — M1: 0.082, M2: 0.077, M3: 0.079, M4: 0.102.  Psoriasis — M1: 0.022, M2: 0.033, M3: 0.038, M4: 0.035.  (Lift not computed: NHANES prevalence unknown due to self-report inflation.)</a:t>
+              <a:t>Lift = AUC-PR / prevalence. Values &gt; 1 mean the formula outperforms random flagging. Y-axis capped at 8× (M2 Lupus = 11.36×, M2 Psoriasis = 7.02×).</a:t>
+            </a:r>
+          </a:p>
+        </p:txBody>
+      </p:sp>
+      <p:pic>
+        <p:nvPicPr>
+          <p:cNvPr id="4" name="Picture 3" descr="image.png"/>
+          <p:cNvPicPr>
+            <a:picLocks noChangeAspect="1"/>
+          </p:cNvPicPr>
+          <p:nvPr/>
+        </p:nvPicPr>
+        <p:blipFill>
+          <a:blip r:embed="rId2"/>
+          <a:stretch>
+            <a:fillRect/>
+          </a:stretch>
+        </p:blipFill>
+        <p:spPr>
+          <a:xfrm>
+            <a:off x="182880" y="1097280"/>
+            <a:ext cx="11887200" cy="5212080"/>
+          </a:xfrm>
+          <a:prstGeom prst="rect">
+            <a:avLst/>
+          </a:prstGeom>
+        </p:spPr>
+      </p:pic>
+      <p:sp>
+        <p:nvSpPr>
+          <p:cNvPr id="5" name="TextBox 4"/>
+          <p:cNvSpPr txBox="1"/>
+          <p:nvPr/>
+        </p:nvSpPr>
+        <p:spPr>
+          <a:xfrm>
+            <a:off x="457200" y="6355080"/>
+            <a:ext cx="11247120" cy="274320"/>
+          </a:xfrm>
+          <a:prstGeom prst="rect">
+            <a:avLst/>
+          </a:prstGeom>
+          <a:noFill/>
+        </p:spPr>
+        <p:txBody>
+          <a:bodyPr wrap="square">
+            <a:spAutoFit/>
+          </a:bodyPr>
+          <a:lstStyle/>
+          <a:p>
+            <a:pPr algn="l"/>
+            <a:r>
+              <a:rPr sz="900" b="0" i="1">
+                <a:solidFill>
+                  <a:srgbClr val="777777"/>
+                </a:solidFill>
+                <a:latin typeface="Calibri"/>
+              </a:rPr>
+              <a:t>B1 = single-feature threshold baseline. M5 (dark green) = Seeded GP using LLM-generated formula seeds. T2D has no M5 (seeding not applied). M2’s high MIMIC lift on lup/psr reflects feature count overfitting — see next slide.</a:t>
             </a:r>
           </a:p>
         </p:txBody>
@@ -12191,9 +12808,9 @@
 </p:sld>
 </file>
 
-<file path=ppt/slides/slide8.xml><?xml version="1.0" encoding="utf-8"?>
+<file path=ppt/slides/slide9.xml><?xml version="1.0" encoding="utf-8"?>
 <p:sld xmlns:a="http://schemas.openxmlformats.org/drawingml/2006/main" xmlns:r="http://schemas.openxmlformats.org/officeDocument/2006/relationships" xmlns:p="http://schemas.openxmlformats.org/presentationml/2006/main">
-  <p:cSld name="Slide 10">
+  <p:cSld>
     <p:spTree>
       <p:nvGrpSpPr>
         <p:cNvPr id="1" name=""/>
@@ -12208,528 +12825,21 @@
           <a:chExt cx="0" cy="0"/>
         </a:xfrm>
       </p:grpSpPr>
-      <p:pic>
-        <p:nvPicPr>
-          <p:cNvPr id="2" name="Image 0" descr="preencoded.png"/>
-          <p:cNvPicPr>
-            <a:picLocks noChangeAspect="1"/>
-          </p:cNvPicPr>
-          <p:nvPr/>
-        </p:nvPicPr>
-        <p:blipFill>
-          <a:blip r:embed="rId3"/>
-          <a:stretch>
-            <a:fillRect/>
-          </a:stretch>
-        </p:blipFill>
-        <p:spPr>
-          <a:xfrm>
-            <a:off x="7619809" y="0"/>
-            <a:ext cx="4571886" cy="6858000"/>
-          </a:xfrm>
-          <a:prstGeom prst="rect">
-            <a:avLst/>
-          </a:prstGeom>
-        </p:spPr>
-      </p:pic>
-      <p:sp>
-        <p:nvSpPr>
-          <p:cNvPr id="3" name="Text 0"/>
-          <p:cNvSpPr/>
-          <p:nvPr/>
-        </p:nvSpPr>
-        <p:spPr>
-          <a:xfrm>
-            <a:off x="734200" y="1045766"/>
-            <a:ext cx="3873105" cy="407888"/>
+      <p:sp>
+        <p:nvSpPr>
+          <p:cNvPr id="2" name="TextBox 1"/>
+          <p:cNvSpPr txBox="1"/>
+          <p:nvPr/>
+        </p:nvSpPr>
+        <p:spPr>
+          <a:xfrm>
+            <a:off x="457200" y="228600"/>
+            <a:ext cx="11247120" cy="502920"/>
           </a:xfrm>
           <a:prstGeom prst="rect">
             <a:avLst/>
           </a:prstGeom>
           <a:noFill/>
-          <a:ln/>
-        </p:spPr>
-        <p:txBody>
-          <a:bodyPr wrap="none" lIns="0" tIns="0" rIns="0" bIns="0" rtlCol="0" anchor="t"/>
-          <a:lstStyle/>
-          <a:p>
-            <a:pPr marL="0" indent="0" algn="l">
-              <a:lnSpc>
-                <a:spcPct val="104000"/>
-              </a:lnSpc>
-              <a:buNone/>
-            </a:pPr>
-            <a:r>
-              <a:rPr lang="en-US" sz="2550" dirty="0">
-                <a:solidFill>
-                  <a:srgbClr val="C6BFEE"/>
-                </a:solidFill>
-                <a:latin typeface="Prompt Medium" pitchFamily="34" charset="0"/>
-                <a:ea typeface="Prompt Medium" pitchFamily="34" charset="-122"/>
-                <a:cs typeface="Prompt Medium" pitchFamily="34" charset="-120"/>
-              </a:rPr>
-              <a:t>Summary &amp; Closing</a:t>
-            </a:r>
-            <a:endParaRPr lang="en-US" sz="2550" dirty="0"/>
-          </a:p>
-        </p:txBody>
-      </p:sp>
-      <p:pic>
-        <p:nvPicPr>
-          <p:cNvPr id="4" name="Image 1" descr="preencoded.png"/>
-          <p:cNvPicPr>
-            <a:picLocks noChangeAspect="1"/>
-          </p:cNvPicPr>
-          <p:nvPr/>
-        </p:nvPicPr>
-        <p:blipFill>
-          <a:blip>
-            <a:extLst>
-              <a:ext uri="{96DAC541-7B7A-43D3-8B79-37D633B846F1}">
-                <asvg:svgBlip xmlns:asvg="http://schemas.microsoft.com/office/drawing/2016/SVG/main" r:embed="rId4"/>
-              </a:ext>
-            </a:extLst>
-          </a:blip>
-          <a:stretch>
-            <a:fillRect/>
-          </a:stretch>
-        </p:blipFill>
-        <p:spPr>
-          <a:xfrm>
-            <a:off x="734200" y="1607840"/>
-            <a:ext cx="3024310" cy="1821755"/>
-          </a:xfrm>
-          <a:prstGeom prst="rect">
-            <a:avLst/>
-          </a:prstGeom>
-        </p:spPr>
-      </p:pic>
-      <p:sp>
-        <p:nvSpPr>
-          <p:cNvPr id="5" name="Text 1"/>
-          <p:cNvSpPr/>
-          <p:nvPr/>
-        </p:nvSpPr>
-        <p:spPr>
-          <a:xfrm>
-            <a:off x="2158251" y="1717973"/>
-            <a:ext cx="176208" cy="220266"/>
-          </a:xfrm>
-          <a:prstGeom prst="rect">
-            <a:avLst/>
-          </a:prstGeom>
-          <a:noFill/>
-          <a:ln/>
-        </p:spPr>
-        <p:txBody>
-          <a:bodyPr wrap="none" lIns="0" tIns="0" rIns="0" bIns="0" rtlCol="0" anchor="ctr"/>
-          <a:lstStyle/>
-          <a:p>
-            <a:pPr marL="0" indent="0" algn="ctr">
-              <a:lnSpc>
-                <a:spcPct val="100000"/>
-              </a:lnSpc>
-              <a:buNone/>
-            </a:pPr>
-            <a:r>
-              <a:rPr lang="en-US" sz="1350" dirty="0">
-                <a:solidFill>
-                  <a:srgbClr val="FFFFFF"/>
-                </a:solidFill>
-                <a:latin typeface="Prompt Medium" pitchFamily="34" charset="0"/>
-                <a:ea typeface="Prompt Medium" pitchFamily="34" charset="-122"/>
-                <a:cs typeface="Prompt Medium" pitchFamily="34" charset="-120"/>
-              </a:rPr>
-              <a:t>1</a:t>
-            </a:r>
-            <a:endParaRPr lang="en-US" sz="1350" dirty="0"/>
-          </a:p>
-        </p:txBody>
-      </p:sp>
-      <p:sp>
-        <p:nvSpPr>
-          <p:cNvPr id="6" name="Text 2"/>
-          <p:cNvSpPr/>
-          <p:nvPr/>
-        </p:nvSpPr>
-        <p:spPr>
-          <a:xfrm>
-            <a:off x="900090" y="2195215"/>
-            <a:ext cx="2692531" cy="407988"/>
-          </a:xfrm>
-          <a:prstGeom prst="rect">
-            <a:avLst/>
-          </a:prstGeom>
-          <a:noFill/>
-          <a:ln/>
-        </p:spPr>
-        <p:txBody>
-          <a:bodyPr wrap="square" lIns="0" tIns="0" rIns="0" bIns="0" rtlCol="0" anchor="t">
-            <a:normAutofit/>
-          </a:bodyPr>
-          <a:lstStyle/>
-          <a:p>
-            <a:pPr marL="0" indent="0" algn="l">
-              <a:lnSpc>
-                <a:spcPct val="104000"/>
-              </a:lnSpc>
-              <a:buNone/>
-            </a:pPr>
-            <a:r>
-              <a:rPr lang="en-US" sz="1250" dirty="0">
-                <a:solidFill>
-                  <a:srgbClr val="DAD8E9"/>
-                </a:solidFill>
-                <a:latin typeface="Prompt Medium" pitchFamily="34" charset="0"/>
-                <a:ea typeface="Prompt Medium" pitchFamily="34" charset="-122"/>
-                <a:cs typeface="Prompt Medium" pitchFamily="34" charset="-120"/>
-              </a:rPr>
-              <a:t>Mathematical Structure &gt; Feature Selection</a:t>
-            </a:r>
-            <a:endParaRPr lang="en-US" sz="1250" dirty="0"/>
-          </a:p>
-        </p:txBody>
-      </p:sp>
-      <p:pic>
-        <p:nvPicPr>
-          <p:cNvPr id="8" name="Image 2" descr="preencoded.png"/>
-          <p:cNvPicPr>
-            <a:picLocks noChangeAspect="1"/>
-          </p:cNvPicPr>
-          <p:nvPr/>
-        </p:nvPicPr>
-        <p:blipFill>
-          <a:blip>
-            <a:extLst>
-              <a:ext uri="{96DAC541-7B7A-43D3-8B79-37D633B846F1}">
-                <asvg:svgBlip xmlns:asvg="http://schemas.microsoft.com/office/drawing/2016/SVG/main" r:embed="rId4"/>
-              </a:ext>
-            </a:extLst>
-          </a:blip>
-          <a:stretch>
-            <a:fillRect/>
-          </a:stretch>
-        </p:blipFill>
-        <p:spPr>
-          <a:xfrm>
-            <a:off x="3861299" y="1607840"/>
-            <a:ext cx="3024310" cy="1821755"/>
-          </a:xfrm>
-          <a:prstGeom prst="rect">
-            <a:avLst/>
-          </a:prstGeom>
-        </p:spPr>
-      </p:pic>
-      <p:sp>
-        <p:nvSpPr>
-          <p:cNvPr id="9" name="Text 4"/>
-          <p:cNvSpPr/>
-          <p:nvPr/>
-        </p:nvSpPr>
-        <p:spPr>
-          <a:xfrm>
-            <a:off x="5285350" y="1717973"/>
-            <a:ext cx="176208" cy="220266"/>
-          </a:xfrm>
-          <a:prstGeom prst="rect">
-            <a:avLst/>
-          </a:prstGeom>
-          <a:noFill/>
-          <a:ln/>
-        </p:spPr>
-        <p:txBody>
-          <a:bodyPr wrap="none" lIns="0" tIns="0" rIns="0" bIns="0" rtlCol="0" anchor="ctr"/>
-          <a:lstStyle/>
-          <a:p>
-            <a:pPr marL="0" indent="0" algn="ctr">
-              <a:lnSpc>
-                <a:spcPct val="100000"/>
-              </a:lnSpc>
-              <a:buNone/>
-            </a:pPr>
-            <a:r>
-              <a:rPr lang="en-US" sz="1350" dirty="0">
-                <a:solidFill>
-                  <a:srgbClr val="FFFFFF"/>
-                </a:solidFill>
-                <a:latin typeface="Prompt Medium" pitchFamily="34" charset="0"/>
-                <a:ea typeface="Prompt Medium" pitchFamily="34" charset="-122"/>
-                <a:cs typeface="Prompt Medium" pitchFamily="34" charset="-120"/>
-              </a:rPr>
-              <a:t>2</a:t>
-            </a:r>
-            <a:endParaRPr lang="en-US" sz="1350" dirty="0"/>
-          </a:p>
-        </p:txBody>
-      </p:sp>
-      <p:sp>
-        <p:nvSpPr>
-          <p:cNvPr id="10" name="Text 5"/>
-          <p:cNvSpPr/>
-          <p:nvPr/>
-        </p:nvSpPr>
-        <p:spPr>
-          <a:xfrm>
-            <a:off x="4027188" y="2195215"/>
-            <a:ext cx="2013793" cy="203994"/>
-          </a:xfrm>
-          <a:prstGeom prst="rect">
-            <a:avLst/>
-          </a:prstGeom>
-          <a:noFill/>
-          <a:ln/>
-        </p:spPr>
-        <p:txBody>
-          <a:bodyPr wrap="none" lIns="0" tIns="0" rIns="0" bIns="0" rtlCol="0" anchor="t"/>
-          <a:lstStyle/>
-          <a:p>
-            <a:pPr marL="0" indent="0" algn="l">
-              <a:lnSpc>
-                <a:spcPct val="104000"/>
-              </a:lnSpc>
-              <a:buNone/>
-            </a:pPr>
-            <a:r>
-              <a:rPr lang="en-US" sz="1250" dirty="0">
-                <a:solidFill>
-                  <a:srgbClr val="DAD8E9"/>
-                </a:solidFill>
-                <a:latin typeface="Prompt Medium" pitchFamily="34" charset="0"/>
-                <a:ea typeface="Prompt Medium" pitchFamily="34" charset="-122"/>
-                <a:cs typeface="Prompt Medium" pitchFamily="34" charset="-120"/>
-              </a:rPr>
-              <a:t>Evolutionary Search Wins</a:t>
-            </a:r>
-            <a:endParaRPr lang="en-US" sz="1250" dirty="0"/>
-          </a:p>
-        </p:txBody>
-      </p:sp>
-      <p:sp>
-        <p:nvSpPr>
-          <p:cNvPr id="11" name="Text 6"/>
-          <p:cNvSpPr/>
-          <p:nvPr/>
-        </p:nvSpPr>
-        <p:spPr>
-          <a:xfrm>
-            <a:off x="4027188" y="2460823"/>
-            <a:ext cx="2692531" cy="798513"/>
-          </a:xfrm>
-          <a:prstGeom prst="rect">
-            <a:avLst/>
-          </a:prstGeom>
-          <a:noFill/>
-          <a:ln/>
-        </p:spPr>
-        <p:txBody>
-          <a:bodyPr wrap="square" lIns="0" tIns="0" rIns="0" bIns="0" rtlCol="0" anchor="t">
-            <a:normAutofit/>
-          </a:bodyPr>
-          <a:lstStyle/>
-          <a:p>
-            <a:pPr marL="0" indent="0" algn="l">
-              <a:lnSpc>
-                <a:spcPct val="113000"/>
-              </a:lnSpc>
-              <a:buNone/>
-            </a:pPr>
-            <a:r>
-              <a:rPr lang="en-US" sz="1150" dirty="0">
-                <a:solidFill>
-                  <a:srgbClr val="DAD8E9"/>
-                </a:solidFill>
-                <a:latin typeface="Mukta Light" pitchFamily="34" charset="0"/>
-                <a:ea typeface="Mukta Light" pitchFamily="34" charset="-122"/>
-                <a:cs typeface="Mukta Light" pitchFamily="34" charset="-120"/>
-              </a:rPr>
-              <a:t>GP beat all methods including a medical LLM. 50,000 structured evaluations over 100 generations found what random attempts and expert heuristics couldn't.</a:t>
-            </a:r>
-            <a:endParaRPr lang="en-US" sz="1150" dirty="0"/>
-          </a:p>
-        </p:txBody>
-      </p:sp>
-      <p:pic>
-        <p:nvPicPr>
-          <p:cNvPr id="12" name="Image 3" descr="preencoded.png"/>
-          <p:cNvPicPr>
-            <a:picLocks noChangeAspect="1"/>
-          </p:cNvPicPr>
-          <p:nvPr/>
-        </p:nvPicPr>
-        <p:blipFill>
-          <a:blip>
-            <a:extLst>
-              <a:ext uri="{96DAC541-7B7A-43D3-8B79-37D633B846F1}">
-                <asvg:svgBlip xmlns:asvg="http://schemas.microsoft.com/office/drawing/2016/SVG/main" r:embed="rId5"/>
-              </a:ext>
-            </a:extLst>
-          </a:blip>
-          <a:stretch>
-            <a:fillRect/>
-          </a:stretch>
-        </p:blipFill>
-        <p:spPr>
-          <a:xfrm>
-            <a:off x="734200" y="3532386"/>
-            <a:ext cx="6151409" cy="1418134"/>
-          </a:xfrm>
-          <a:prstGeom prst="rect">
-            <a:avLst/>
-          </a:prstGeom>
-        </p:spPr>
-      </p:pic>
-      <p:sp>
-        <p:nvSpPr>
-          <p:cNvPr id="13" name="Text 7"/>
-          <p:cNvSpPr/>
-          <p:nvPr/>
-        </p:nvSpPr>
-        <p:spPr>
-          <a:xfrm>
-            <a:off x="3721801" y="3642519"/>
-            <a:ext cx="176208" cy="220266"/>
-          </a:xfrm>
-          <a:prstGeom prst="rect">
-            <a:avLst/>
-          </a:prstGeom>
-          <a:noFill/>
-          <a:ln/>
-        </p:spPr>
-        <p:txBody>
-          <a:bodyPr wrap="none" lIns="0" tIns="0" rIns="0" bIns="0" rtlCol="0" anchor="ctr"/>
-          <a:lstStyle/>
-          <a:p>
-            <a:pPr marL="0" indent="0" algn="ctr">
-              <a:lnSpc>
-                <a:spcPct val="100000"/>
-              </a:lnSpc>
-              <a:buNone/>
-            </a:pPr>
-            <a:r>
-              <a:rPr lang="en-US" sz="1350" dirty="0">
-                <a:solidFill>
-                  <a:srgbClr val="FFFFFF"/>
-                </a:solidFill>
-                <a:latin typeface="Prompt Medium" pitchFamily="34" charset="0"/>
-                <a:ea typeface="Prompt Medium" pitchFamily="34" charset="-122"/>
-                <a:cs typeface="Prompt Medium" pitchFamily="34" charset="-120"/>
-              </a:rPr>
-              <a:t>3</a:t>
-            </a:r>
-            <a:endParaRPr lang="en-US" sz="1350" dirty="0"/>
-          </a:p>
-        </p:txBody>
-      </p:sp>
-      <p:sp>
-        <p:nvSpPr>
-          <p:cNvPr id="14" name="Text 8"/>
-          <p:cNvSpPr/>
-          <p:nvPr/>
-        </p:nvSpPr>
-        <p:spPr>
-          <a:xfrm>
-            <a:off x="900090" y="4119761"/>
-            <a:ext cx="2780139" cy="203994"/>
-          </a:xfrm>
-          <a:prstGeom prst="rect">
-            <a:avLst/>
-          </a:prstGeom>
-          <a:noFill/>
-          <a:ln/>
-        </p:spPr>
-        <p:txBody>
-          <a:bodyPr wrap="none" lIns="0" tIns="0" rIns="0" bIns="0" rtlCol="0" anchor="t"/>
-          <a:lstStyle/>
-          <a:p>
-            <a:pPr marL="0" indent="0" algn="l">
-              <a:lnSpc>
-                <a:spcPct val="104000"/>
-              </a:lnSpc>
-              <a:buNone/>
-            </a:pPr>
-            <a:r>
-              <a:rPr lang="en-US" sz="1250" dirty="0">
-                <a:solidFill>
-                  <a:srgbClr val="DAD8E9"/>
-                </a:solidFill>
-                <a:latin typeface="Prompt Medium" pitchFamily="34" charset="0"/>
-                <a:ea typeface="Prompt Medium" pitchFamily="34" charset="-122"/>
-                <a:cs typeface="Prompt Medium" pitchFamily="34" charset="-120"/>
-              </a:rPr>
-              <a:t>The Framework Is the Contribution</a:t>
-            </a:r>
-            <a:endParaRPr lang="en-US" sz="1250" dirty="0"/>
-          </a:p>
-        </p:txBody>
-      </p:sp>
-      <p:sp>
-        <p:nvSpPr>
-          <p:cNvPr id="16" name="Text 10"/>
-          <p:cNvSpPr/>
-          <p:nvPr/>
-        </p:nvSpPr>
-        <p:spPr>
-          <a:xfrm>
-            <a:off x="734200" y="5181699"/>
-            <a:ext cx="5931148" cy="399256"/>
-          </a:xfrm>
-          <a:prstGeom prst="rect">
-            <a:avLst/>
-          </a:prstGeom>
-          <a:noFill/>
-          <a:ln/>
-        </p:spPr>
-        <p:txBody>
-          <a:bodyPr wrap="square" lIns="0" tIns="0" rIns="0" bIns="0" rtlCol="0" anchor="t">
-            <a:normAutofit/>
-          </a:bodyPr>
-          <a:lstStyle/>
-          <a:p>
-            <a:pPr marL="0" indent="0" algn="r" rtl="1">
-              <a:lnSpc>
-                <a:spcPct val="113000"/>
-              </a:lnSpc>
-              <a:buNone/>
-            </a:pPr>
-            <a:endParaRPr lang="he-IL" sz="1150" dirty="0">
-              <a:latin typeface="+mj-lt"/>
-            </a:endParaRPr>
-          </a:p>
-        </p:txBody>
-      </p:sp>
-    </p:spTree>
-  </p:cSld>
-  <p:clrMapOvr>
-    <a:masterClrMapping/>
-  </p:clrMapOvr>
-</p:sld>
-</file>
-
-<file path=ppt/slides/slide9.xml><?xml version="1.0" encoding="utf-8"?>
-<p:sld xmlns:a="http://schemas.openxmlformats.org/drawingml/2006/main" xmlns:p="http://schemas.openxmlformats.org/presentationml/2006/main" xmlns:r="http://schemas.openxmlformats.org/officeDocument/2006/relationships">
-  <p:cSld>
-    <p:spTree>
-      <p:nvGrpSpPr>
-        <p:cNvPr id="1" name=""/>
-        <p:cNvGrpSpPr/>
-        <p:nvPr/>
-      </p:nvGrpSpPr>
-      <p:grpSpPr/>
-      <p:sp>
-        <p:nvSpPr>
-          <p:cNvPr id="2" name="TextBox 1"/>
-          <p:cNvSpPr txBox="1"/>
-          <p:nvPr/>
-        </p:nvSpPr>
-        <p:spPr>
-          <a:xfrm>
-            <a:off x="457200" y="411480"/>
-            <a:ext cx="11247120" cy="594360"/>
-          </a:xfrm>
-          <a:prstGeom prst="rect">
-            <a:avLst/>
-          </a:prstGeom>
-          <a:noFill/>
         </p:spPr>
         <p:txBody>
           <a:bodyPr wrap="square">
@@ -12739,70 +12849,27 @@
           <a:p>
             <a:pPr algn="l"/>
             <a:r>
-              <a:rPr sz="2600" b="1" i="0">
+              <a:rPr sz="2200" b="1" i="0">
                 <a:solidFill>
                   <a:srgbClr val="1F397D"/>
                 </a:solidFill>
                 <a:latin typeface="Calibri"/>
               </a:rPr>
-              <a:t>Why Rheumatoid Arthritis?</a:t>
+              <a:t>Why M5? M2 Overfits — M5 Generalises</a:t>
             </a:r>
           </a:p>
         </p:txBody>
       </p:sp>
       <p:sp>
         <p:nvSpPr>
-          <p:cNvPr id="3" name="Rectangle 2"/>
-          <p:cNvSpPr/>
-          <p:nvPr/>
-        </p:nvSpPr>
-        <p:spPr>
-          <a:xfrm>
-            <a:off x="457200" y="1051560"/>
-            <a:ext cx="11247120" cy="36576"/>
-          </a:xfrm>
-          <a:prstGeom prst="rect">
-            <a:avLst/>
-          </a:prstGeom>
-          <a:solidFill>
-            <a:srgbClr val="1F397D"/>
-          </a:solidFill>
-          <a:ln>
-            <a:noFill/>
-          </a:ln>
-        </p:spPr>
-        <p:style>
-          <a:lnRef idx="1">
-            <a:schemeClr val="accent1"/>
-          </a:lnRef>
-          <a:fillRef idx="3">
-            <a:schemeClr val="accent1"/>
-          </a:fillRef>
-          <a:effectRef idx="2">
-            <a:schemeClr val="accent1"/>
-          </a:effectRef>
-          <a:fontRef idx="minor">
-            <a:schemeClr val="lt1"/>
-          </a:fontRef>
-        </p:style>
-        <p:txBody>
-          <a:bodyPr rtlCol="0" anchor="ctr"/>
-          <a:lstStyle/>
-          <a:p>
-            <a:pPr algn="ctr"/>
-          </a:p>
-        </p:txBody>
-      </p:sp>
-      <p:sp>
-        <p:nvSpPr>
-          <p:cNvPr id="4" name="TextBox 3"/>
+          <p:cNvPr id="3" name="TextBox 2"/>
           <p:cNvSpPr txBox="1"/>
           <p:nvPr/>
         </p:nvSpPr>
         <p:spPr>
           <a:xfrm>
-            <a:off x="457200" y="1188720"/>
-            <a:ext cx="5303520" cy="274320"/>
+            <a:off x="457200" y="758952"/>
+            <a:ext cx="11247120" cy="274320"/>
           </a:xfrm>
           <a:prstGeom prst="rect">
             <a:avLst/>
@@ -12817,17 +12884,41 @@
           <a:p>
             <a:pPr algn="l"/>
             <a:r>
-              <a:rPr sz="1100" b="1" i="0">
+              <a:rPr sz="1000" b="0" i="1">
                 <a:solidFill>
-                  <a:srgbClr val="1F397D"/>
+                  <a:srgbClr val="555555"/>
                 </a:solidFill>
                 <a:latin typeface="Calibri"/>
               </a:rPr>
-              <a:t>THE DISEASE</a:t>
+              <a:t>M2 (Random Search) uses 4–13 features and achieves very high MIMIC test-set lift. On EHRSHOT (unseen Stanford data) that advantage nearly vanishes. M5 (Seeded GP, 3–6 features) is more consistent across both datasets.</a:t>
             </a:r>
           </a:p>
         </p:txBody>
       </p:sp>
+      <p:pic>
+        <p:nvPicPr>
+          <p:cNvPr id="4" name="Picture 3" descr="image.png"/>
+          <p:cNvPicPr>
+            <a:picLocks noChangeAspect="1"/>
+          </p:cNvPicPr>
+          <p:nvPr/>
+        </p:nvPicPr>
+        <p:blipFill>
+          <a:blip r:embed="rId2"/>
+          <a:stretch>
+            <a:fillRect/>
+          </a:stretch>
+        </p:blipFill>
+        <p:spPr>
+          <a:xfrm>
+            <a:off x="182880" y="1097280"/>
+            <a:ext cx="11887200" cy="5029200"/>
+          </a:xfrm>
+          <a:prstGeom prst="rect">
+            <a:avLst/>
+          </a:prstGeom>
+        </p:spPr>
+      </p:pic>
       <p:sp>
         <p:nvSpPr>
           <p:cNvPr id="5" name="TextBox 4"/>
@@ -12836,8 +12927,8 @@
         </p:nvSpPr>
         <p:spPr>
           <a:xfrm>
-            <a:off x="457200" y="1508760"/>
-            <a:ext cx="5303520" cy="2194560"/>
+            <a:off x="457200" y="6217920"/>
+            <a:ext cx="11247120" cy="365760"/>
           </a:xfrm>
           <a:prstGeom prst="rect">
             <a:avLst/>
@@ -12852,126 +12943,13 @@
           <a:p>
             <a:pPr algn="l"/>
             <a:r>
-              <a:rPr sz="1200" b="0" i="0">
+              <a:rPr sz="900" b="0" i="1">
                 <a:solidFill>
-                  <a:srgbClr val="222222"/>
+                  <a:srgbClr val="555555"/>
                 </a:solidFill>
                 <a:latin typeface="Calibri"/>
               </a:rPr>
-              <a:t>Rheumatoid Arthritis is a systemic autoimmune disease affecting ~1% of adults worldwide, causing progressive joint damage and systemic inflammation.
-Diagnosis is often delayed 1–2 years: early symptoms are non-specific, and confirmation requires specialist referral, anti-CCP serology, and imaging — resources not always available in primary care.
-Early treatment (within 3–6 months of onset) dramatically slows joint destruction. Each month of delay worsens long-term outcomes.</a:t>
-            </a:r>
-          </a:p>
-        </p:txBody>
-      </p:sp>
-      <p:sp>
-        <p:nvSpPr>
-          <p:cNvPr id="6" name="TextBox 5"/>
-          <p:cNvSpPr txBox="1"/>
-          <p:nvPr/>
-        </p:nvSpPr>
-        <p:spPr>
-          <a:xfrm>
-            <a:off x="6217920" y="1188720"/>
-            <a:ext cx="5394960" cy="274320"/>
-          </a:xfrm>
-          <a:prstGeom prst="rect">
-            <a:avLst/>
-          </a:prstGeom>
-          <a:noFill/>
-        </p:spPr>
-        <p:txBody>
-          <a:bodyPr wrap="square">
-            <a:spAutoFit/>
-          </a:bodyPr>
-          <a:lstStyle/>
-          <a:p>
-            <a:pPr algn="l"/>
-            <a:r>
-              <a:rPr sz="1100" b="1" i="0">
-                <a:solidFill>
-                  <a:srgbClr val="1F397D"/>
-                </a:solidFill>
-                <a:latin typeface="Calibri"/>
-              </a:rPr>
-              <a:t>WHY A CBC BIOMARKER?</a:t>
-            </a:r>
-          </a:p>
-        </p:txBody>
-      </p:sp>
-      <p:sp>
-        <p:nvSpPr>
-          <p:cNvPr id="7" name="TextBox 6"/>
-          <p:cNvSpPr txBox="1"/>
-          <p:nvPr/>
-        </p:nvSpPr>
-        <p:spPr>
-          <a:xfrm>
-            <a:off x="6217920" y="1508760"/>
-            <a:ext cx="5394960" cy="3840480"/>
-          </a:xfrm>
-          <a:prstGeom prst="rect">
-            <a:avLst/>
-          </a:prstGeom>
-          <a:noFill/>
-        </p:spPr>
-        <p:txBody>
-          <a:bodyPr wrap="square">
-            <a:spAutoFit/>
-          </a:bodyPr>
-          <a:lstStyle/>
-          <a:p>
-            <a:pPr algn="l"/>
-            <a:r>
-              <a:rPr sz="1200" b="0" i="0">
-                <a:solidFill>
-                  <a:srgbClr val="222222"/>
-                </a:solidFill>
-                <a:latin typeface="Calibri"/>
-              </a:rPr>
-              <a:t>A Complete Blood Count is ordered in virtually every routine hospital visit — cheap (~$15), fast, and universally available.
-A CBC-based alert could flag patients for specialist referral before symptoms are clinically obvious, closing the diagnosis gap in primary care.
-Why does CBC carry RA signal?
-• Chronic inflammation ↑ monocyte %  —  monocytes are key mediators of RA synovial inflammation
-• Inflammation suppresses red cell production → anemia of chronic disease  (↓ hematocrit, ↓ MCHC)
-• These signals appear directly in the winning formula:
-    (mono_pct / neut_pct)² × log(hct − mchc)</a:t>
-            </a:r>
-          </a:p>
-        </p:txBody>
-      </p:sp>
-      <p:sp>
-        <p:nvSpPr>
-          <p:cNvPr id="8" name="TextBox 7"/>
-          <p:cNvSpPr txBox="1"/>
-          <p:nvPr/>
-        </p:nvSpPr>
-        <p:spPr>
-          <a:xfrm>
-            <a:off x="457200" y="6309360"/>
-            <a:ext cx="11247120" cy="320040"/>
-          </a:xfrm>
-          <a:prstGeom prst="rect">
-            <a:avLst/>
-          </a:prstGeom>
-          <a:noFill/>
-        </p:spPr>
-        <p:txBody>
-          <a:bodyPr wrap="square">
-            <a:spAutoFit/>
-          </a:bodyPr>
-          <a:lstStyle/>
-          <a:p>
-            <a:pPr algn="l"/>
-            <a:r>
-              <a:rPr sz="1000" b="0" i="1">
-                <a:solidFill>
-                  <a:srgbClr val="777777"/>
-                </a:solidFill>
-                <a:latin typeface="Calibri"/>
-              </a:rPr>
-              <a:t>Focus disease throughout this presentation. Results for all 6 diseases shown in the multi-disease summary slide.</a:t>
+              <a:t>Features used:  RA: M2=9, M5=4   |   Crohn: M2=13, M5=4   |   T1D: M2=6, M5=9   |   Psoriasis: M2=4, M5=3   |   Lupus: M2=8, M5=6</a:t>
             </a:r>
           </a:p>
         </p:txBody>
